--- a/Lectures/Lecture13-InterpretabilityOverview.pptx
+++ b/Lectures/Lecture13-InterpretabilityOverview.pptx
@@ -5,7 +5,7 @@
     <p:sldMasterId id="2147483648" r:id="rId1"/>
   </p:sldMasterIdLst>
   <p:notesMasterIdLst>
-    <p:notesMasterId r:id="rId30"/>
+    <p:notesMasterId r:id="rId36"/>
   </p:notesMasterIdLst>
   <p:sldIdLst>
     <p:sldId id="256" r:id="rId2"/>
@@ -18,29 +18,35 @@
     <p:sldId id="526" r:id="rId9"/>
     <p:sldId id="262" r:id="rId10"/>
     <p:sldId id="263" r:id="rId11"/>
-    <p:sldId id="264" r:id="rId12"/>
-    <p:sldId id="266" r:id="rId13"/>
-    <p:sldId id="500" r:id="rId14"/>
-    <p:sldId id="499" r:id="rId15"/>
-    <p:sldId id="513" r:id="rId16"/>
-    <p:sldId id="516" r:id="rId17"/>
-    <p:sldId id="517" r:id="rId18"/>
-    <p:sldId id="518" r:id="rId19"/>
-    <p:sldId id="519" r:id="rId20"/>
-    <p:sldId id="520" r:id="rId21"/>
-    <p:sldId id="279" r:id="rId22"/>
-    <p:sldId id="522" r:id="rId23"/>
-    <p:sldId id="280" r:id="rId24"/>
-    <p:sldId id="523" r:id="rId25"/>
-    <p:sldId id="281" r:id="rId26"/>
-    <p:sldId id="524" r:id="rId27"/>
-    <p:sldId id="525" r:id="rId28"/>
-    <p:sldId id="512" r:id="rId29"/>
+    <p:sldId id="528" r:id="rId12"/>
+    <p:sldId id="531" r:id="rId13"/>
+    <p:sldId id="529" r:id="rId14"/>
+    <p:sldId id="264" r:id="rId15"/>
+    <p:sldId id="266" r:id="rId16"/>
+    <p:sldId id="500" r:id="rId17"/>
+    <p:sldId id="499" r:id="rId18"/>
+    <p:sldId id="513" r:id="rId19"/>
+    <p:sldId id="516" r:id="rId20"/>
+    <p:sldId id="517" r:id="rId21"/>
+    <p:sldId id="518" r:id="rId22"/>
+    <p:sldId id="519" r:id="rId23"/>
+    <p:sldId id="520" r:id="rId24"/>
+    <p:sldId id="279" r:id="rId25"/>
+    <p:sldId id="522" r:id="rId26"/>
+    <p:sldId id="280" r:id="rId27"/>
+    <p:sldId id="523" r:id="rId28"/>
+    <p:sldId id="281" r:id="rId29"/>
+    <p:sldId id="524" r:id="rId30"/>
+    <p:sldId id="525" r:id="rId31"/>
+    <p:sldId id="532" r:id="rId32"/>
+    <p:sldId id="533" r:id="rId33"/>
+    <p:sldId id="534" r:id="rId34"/>
+    <p:sldId id="512" r:id="rId35"/>
   </p:sldIdLst>
   <p:sldSz cx="12192000" cy="6858000"/>
   <p:notesSz cx="6858000" cy="9144000"/>
   <p:custDataLst>
-    <p:tags r:id="rId31"/>
+    <p:tags r:id="rId37"/>
   </p:custDataLst>
   <p:defaultTextStyle>
     <a:defPPr marR="0" lvl="0" algn="l" rtl="0">
@@ -276,7 +282,7 @@
       <p15:sldGuideLst xmlns:p15="http://schemas.microsoft.com/office/powerpoint/2012/main"/>
     </p:ext>
     <p:ext uri="http://customooxmlschemas.google.com/">
-      <go:slidesCustomData xmlns:go="http://customooxmlschemas.google.com/" xmlns:p15="http://schemas.microsoft.com/office/powerpoint/2012/main" xmlns:p14="http://schemas.microsoft.com/office/powerpoint/2010/main" xmlns:com="http://schemas.openxmlformats.org/drawingml/2006/compatibility" xmlns:pvml="urn:schemas-microsoft-com:office:powerpoint" xmlns:v="urn:schemas-microsoft-com:vml" xmlns:o="urn:schemas-microsoft-com:office:office" xmlns:dgm="http://schemas.openxmlformats.org/drawingml/2006/diagram" xmlns:c="http://schemas.openxmlformats.org/drawingml/2006/chart" xmlns:mv="urn:schemas-microsoft-com:mac:vml" xmlns:mc="http://schemas.openxmlformats.org/markup-compatibility/2006" xmlns="" r:id="rId33" roundtripDataSignature="AMtx7mhE+28Dr6x2pr2JNXfuZKhsL7KtRg=="/>
+      <go:slidesCustomData xmlns:go="http://customooxmlschemas.google.com/" xmlns:p15="http://schemas.microsoft.com/office/powerpoint/2012/main" xmlns:p14="http://schemas.microsoft.com/office/powerpoint/2010/main" xmlns:com="http://schemas.openxmlformats.org/drawingml/2006/compatibility" xmlns:pvml="urn:schemas-microsoft-com:office:powerpoint" xmlns:v="urn:schemas-microsoft-com:vml" xmlns:o="urn:schemas-microsoft-com:office:office" xmlns:dgm="http://schemas.openxmlformats.org/drawingml/2006/diagram" xmlns:c="http://schemas.openxmlformats.org/drawingml/2006/chart" xmlns:mv="urn:schemas-microsoft-com:mac:vml" xmlns:mc="http://schemas.openxmlformats.org/markup-compatibility/2006" xmlns="" r:id="rId38" roundtripDataSignature="AMtx7mhE+28Dr6x2pr2JNXfuZKhsL7KtRg=="/>
     </p:ext>
   </p:extLst>
 </p:presentation>
@@ -15236,6 +15242,378 @@
   <p:cSld>
     <p:spTree>
       <p:nvGrpSpPr>
+        <p:cNvPr id="1" name=""/>
+        <p:cNvGrpSpPr/>
+        <p:nvPr/>
+      </p:nvGrpSpPr>
+      <p:grpSpPr>
+        <a:xfrm>
+          <a:off x="0" y="0"/>
+          <a:ext cx="0" cy="0"/>
+          <a:chOff x="0" y="0"/>
+          <a:chExt cx="0" cy="0"/>
+        </a:xfrm>
+      </p:grpSpPr>
+      <p:sp>
+        <p:nvSpPr>
+          <p:cNvPr id="2" name="Title 1">
+            <a:extLst>
+              <a:ext uri="{FF2B5EF4-FFF2-40B4-BE49-F238E27FC236}">
+                <a16:creationId xmlns:a16="http://schemas.microsoft.com/office/drawing/2014/main" id="{50487EF6-8B03-B0F4-F062-95ECED381053}"/>
+              </a:ext>
+            </a:extLst>
+          </p:cNvPr>
+          <p:cNvSpPr>
+            <a:spLocks noGrp="1"/>
+          </p:cNvSpPr>
+          <p:nvPr>
+            <p:ph type="title"/>
+          </p:nvPr>
+        </p:nvSpPr>
+        <p:spPr/>
+        <p:txBody>
+          <a:bodyPr/>
+          <a:lstStyle/>
+          <a:p>
+            <a:r>
+              <a:rPr lang="en-US" dirty="0"/>
+              <a:t>Types of </a:t>
+            </a:r>
+            <a:r>
+              <a:rPr lang="en-US" dirty="0" err="1"/>
+              <a:t>Interpretablity</a:t>
+            </a:r>
+            <a:r>
+              <a:rPr lang="en-US" dirty="0"/>
+              <a:t> Methods</a:t>
+            </a:r>
+          </a:p>
+        </p:txBody>
+      </p:sp>
+      <p:sp>
+        <p:nvSpPr>
+          <p:cNvPr id="3" name="Text Placeholder 2">
+            <a:extLst>
+              <a:ext uri="{FF2B5EF4-FFF2-40B4-BE49-F238E27FC236}">
+                <a16:creationId xmlns:a16="http://schemas.microsoft.com/office/drawing/2014/main" id="{83A79153-E496-ACBE-14A6-64DB9C6D5FBC}"/>
+              </a:ext>
+            </a:extLst>
+          </p:cNvPr>
+          <p:cNvSpPr>
+            <a:spLocks noGrp="1"/>
+          </p:cNvSpPr>
+          <p:nvPr>
+            <p:ph type="body" idx="1"/>
+          </p:nvPr>
+        </p:nvSpPr>
+        <p:spPr/>
+        <p:txBody>
+          <a:bodyPr/>
+          <a:lstStyle/>
+          <a:p>
+            <a:r>
+              <a:rPr lang="en-US" dirty="0"/>
+              <a:t>Global vs Local</a:t>
+            </a:r>
+          </a:p>
+          <a:p>
+            <a:r>
+              <a:rPr lang="en-US" dirty="0"/>
+              <a:t>Inherently Interpretable models vs Post-hoc model agnostic</a:t>
+            </a:r>
+          </a:p>
+        </p:txBody>
+      </p:sp>
+    </p:spTree>
+    <p:extLst>
+      <p:ext uri="{BB962C8B-B14F-4D97-AF65-F5344CB8AC3E}">
+        <p14:creationId xmlns:p14="http://schemas.microsoft.com/office/powerpoint/2010/main" val="2413394886"/>
+      </p:ext>
+    </p:extLst>
+  </p:cSld>
+  <p:clrMapOvr>
+    <a:masterClrMapping/>
+  </p:clrMapOvr>
+</p:sld>
+</file>
+
+<file path=ppt/slides/slide12.xml><?xml version="1.0" encoding="utf-8"?>
+<p:sld xmlns:a="http://schemas.openxmlformats.org/drawingml/2006/main" xmlns:r="http://schemas.openxmlformats.org/officeDocument/2006/relationships" xmlns:p="http://schemas.openxmlformats.org/presentationml/2006/main">
+  <p:cSld>
+    <p:spTree>
+      <p:nvGrpSpPr>
+        <p:cNvPr id="1" name="">
+          <a:extLst>
+            <a:ext uri="{FF2B5EF4-FFF2-40B4-BE49-F238E27FC236}">
+              <a16:creationId xmlns:a16="http://schemas.microsoft.com/office/drawing/2014/main" id="{ECCC77D8-A61C-B890-1B4F-C13428B1BF28}"/>
+            </a:ext>
+          </a:extLst>
+        </p:cNvPr>
+        <p:cNvGrpSpPr/>
+        <p:nvPr/>
+      </p:nvGrpSpPr>
+      <p:grpSpPr>
+        <a:xfrm>
+          <a:off x="0" y="0"/>
+          <a:ext cx="0" cy="0"/>
+          <a:chOff x="0" y="0"/>
+          <a:chExt cx="0" cy="0"/>
+        </a:xfrm>
+      </p:grpSpPr>
+      <p:sp>
+        <p:nvSpPr>
+          <p:cNvPr id="2" name="Title 1">
+            <a:extLst>
+              <a:ext uri="{FF2B5EF4-FFF2-40B4-BE49-F238E27FC236}">
+                <a16:creationId xmlns:a16="http://schemas.microsoft.com/office/drawing/2014/main" id="{0281F420-D67D-3749-7796-D473050B303C}"/>
+              </a:ext>
+            </a:extLst>
+          </p:cNvPr>
+          <p:cNvSpPr>
+            <a:spLocks noGrp="1"/>
+          </p:cNvSpPr>
+          <p:nvPr>
+            <p:ph type="title"/>
+          </p:nvPr>
+        </p:nvSpPr>
+        <p:spPr/>
+        <p:txBody>
+          <a:bodyPr/>
+          <a:lstStyle/>
+          <a:p>
+            <a:r>
+              <a:rPr lang="en-US" dirty="0"/>
+              <a:t>Global vs. Local</a:t>
+            </a:r>
+          </a:p>
+        </p:txBody>
+      </p:sp>
+      <p:sp>
+        <p:nvSpPr>
+          <p:cNvPr id="3" name="Text Placeholder 2">
+            <a:extLst>
+              <a:ext uri="{FF2B5EF4-FFF2-40B4-BE49-F238E27FC236}">
+                <a16:creationId xmlns:a16="http://schemas.microsoft.com/office/drawing/2014/main" id="{98F1DCF5-80BC-22B8-58C0-F939AE753D5F}"/>
+              </a:ext>
+            </a:extLst>
+          </p:cNvPr>
+          <p:cNvSpPr>
+            <a:spLocks noGrp="1"/>
+          </p:cNvSpPr>
+          <p:nvPr>
+            <p:ph type="body" idx="1"/>
+          </p:nvPr>
+        </p:nvSpPr>
+        <p:spPr/>
+        <p:txBody>
+          <a:bodyPr/>
+          <a:lstStyle/>
+          <a:p>
+            <a:pPr marL="76200" indent="0">
+              <a:buNone/>
+            </a:pPr>
+            <a:endParaRPr lang="en-US" dirty="0"/>
+          </a:p>
+          <a:p>
+            <a:r>
+              <a:rPr lang="en-US" dirty="0"/>
+              <a:t>Global: how the entire model behaves on average.</a:t>
+            </a:r>
+          </a:p>
+          <a:p>
+            <a:pPr marL="76200" indent="0">
+              <a:buNone/>
+            </a:pPr>
+            <a:r>
+              <a:rPr lang="en-US" dirty="0"/>
+              <a:t>		e.g. feature importance, coefficients, partial-dependence plots.</a:t>
+            </a:r>
+          </a:p>
+          <a:p>
+            <a:endParaRPr lang="en-US" dirty="0"/>
+          </a:p>
+          <a:p>
+            <a:r>
+              <a:rPr lang="en-US" dirty="0"/>
+              <a:t>Local: why one prediction was made.</a:t>
+            </a:r>
+          </a:p>
+          <a:p>
+            <a:pPr lvl="1"/>
+            <a:r>
+              <a:rPr lang="en-US" dirty="0"/>
+              <a:t>e.g. SHAP or LIME explanation for a single case.</a:t>
+            </a:r>
+          </a:p>
+          <a:p>
+            <a:endParaRPr lang="en-US" dirty="0"/>
+          </a:p>
+          <a:p>
+            <a:endParaRPr lang="en-US" dirty="0"/>
+          </a:p>
+          <a:p>
+            <a:endParaRPr lang="en-US" dirty="0"/>
+          </a:p>
+          <a:p>
+            <a:endParaRPr lang="en-US" dirty="0"/>
+          </a:p>
+          <a:p>
+            <a:endParaRPr lang="en-US" dirty="0"/>
+          </a:p>
+          <a:p>
+            <a:endParaRPr lang="en-US" dirty="0"/>
+          </a:p>
+        </p:txBody>
+      </p:sp>
+    </p:spTree>
+    <p:extLst>
+      <p:ext uri="{BB962C8B-B14F-4D97-AF65-F5344CB8AC3E}">
+        <p14:creationId xmlns:p14="http://schemas.microsoft.com/office/powerpoint/2010/main" val="1019319694"/>
+      </p:ext>
+    </p:extLst>
+  </p:cSld>
+  <p:clrMapOvr>
+    <a:masterClrMapping/>
+  </p:clrMapOvr>
+</p:sld>
+</file>
+
+<file path=ppt/slides/slide13.xml><?xml version="1.0" encoding="utf-8"?>
+<p:sld xmlns:a="http://schemas.openxmlformats.org/drawingml/2006/main" xmlns:r="http://schemas.openxmlformats.org/officeDocument/2006/relationships" xmlns:p="http://schemas.openxmlformats.org/presentationml/2006/main">
+  <p:cSld>
+    <p:spTree>
+      <p:nvGrpSpPr>
+        <p:cNvPr id="1" name=""/>
+        <p:cNvGrpSpPr/>
+        <p:nvPr/>
+      </p:nvGrpSpPr>
+      <p:grpSpPr>
+        <a:xfrm>
+          <a:off x="0" y="0"/>
+          <a:ext cx="0" cy="0"/>
+          <a:chOff x="0" y="0"/>
+          <a:chExt cx="0" cy="0"/>
+        </a:xfrm>
+      </p:grpSpPr>
+      <p:sp>
+        <p:nvSpPr>
+          <p:cNvPr id="2" name="Title 1">
+            <a:extLst>
+              <a:ext uri="{FF2B5EF4-FFF2-40B4-BE49-F238E27FC236}">
+                <a16:creationId xmlns:a16="http://schemas.microsoft.com/office/drawing/2014/main" id="{621BF58B-ED20-8B52-A6FE-0B1AA72FBBE2}"/>
+              </a:ext>
+            </a:extLst>
+          </p:cNvPr>
+          <p:cNvSpPr>
+            <a:spLocks noGrp="1"/>
+          </p:cNvSpPr>
+          <p:nvPr>
+            <p:ph type="title"/>
+          </p:nvPr>
+        </p:nvSpPr>
+        <p:spPr/>
+        <p:txBody>
+          <a:bodyPr/>
+          <a:lstStyle/>
+          <a:p>
+            <a:r>
+              <a:rPr lang="en-US" b="1" dirty="0"/>
+              <a:t>Intrinsic vs. Post-hoc</a:t>
+            </a:r>
+            <a:br>
+              <a:rPr lang="en-US" b="1" dirty="0"/>
+            </a:br>
+            <a:endParaRPr lang="en-US" dirty="0"/>
+          </a:p>
+        </p:txBody>
+      </p:sp>
+      <p:sp>
+        <p:nvSpPr>
+          <p:cNvPr id="3" name="Text Placeholder 2">
+            <a:extLst>
+              <a:ext uri="{FF2B5EF4-FFF2-40B4-BE49-F238E27FC236}">
+                <a16:creationId xmlns:a16="http://schemas.microsoft.com/office/drawing/2014/main" id="{91EA8144-03B2-777F-6E22-70E87D6C2898}"/>
+              </a:ext>
+            </a:extLst>
+          </p:cNvPr>
+          <p:cNvSpPr>
+            <a:spLocks noGrp="1"/>
+          </p:cNvSpPr>
+          <p:nvPr>
+            <p:ph type="body" idx="1"/>
+          </p:nvPr>
+        </p:nvSpPr>
+        <p:spPr/>
+        <p:txBody>
+          <a:bodyPr/>
+          <a:lstStyle/>
+          <a:p>
+            <a:r>
+              <a:rPr lang="en-US" b="1" dirty="0"/>
+              <a:t>Intrinsic</a:t>
+            </a:r>
+            <a:r>
+              <a:rPr lang="en-US" dirty="0"/>
+              <a:t> — Model itself is understandable (e.g., linear regression, decision trees, generalized additive models).</a:t>
+            </a:r>
+          </a:p>
+          <a:p>
+            <a:r>
+              <a:rPr lang="en-US" b="1" dirty="0"/>
+              <a:t>Post-hoc</a:t>
+            </a:r>
+            <a:r>
+              <a:rPr lang="en-US" dirty="0"/>
+              <a:t> — Use secondary methods to explain black boxes (e.g., SHAP, LIME, Grad-CAM).</a:t>
+            </a:r>
+          </a:p>
+          <a:p>
+            <a:endParaRPr lang="en-US" dirty="0"/>
+          </a:p>
+          <a:p>
+            <a:endParaRPr lang="en-US" dirty="0"/>
+          </a:p>
+          <a:p>
+            <a:pPr marL="76200" indent="0" algn="ctr">
+              <a:buNone/>
+            </a:pPr>
+            <a:r>
+              <a:rPr lang="en-US" sz="4000" dirty="0"/>
+              <a:t>Tradeoffs?</a:t>
+            </a:r>
+          </a:p>
+          <a:p>
+            <a:endParaRPr lang="en-US" dirty="0"/>
+          </a:p>
+          <a:p>
+            <a:endParaRPr lang="en-US" dirty="0"/>
+          </a:p>
+          <a:p>
+            <a:endParaRPr lang="en-US" dirty="0"/>
+          </a:p>
+          <a:p>
+            <a:endParaRPr lang="en-US" dirty="0"/>
+          </a:p>
+        </p:txBody>
+      </p:sp>
+    </p:spTree>
+    <p:extLst>
+      <p:ext uri="{BB962C8B-B14F-4D97-AF65-F5344CB8AC3E}">
+        <p14:creationId xmlns:p14="http://schemas.microsoft.com/office/powerpoint/2010/main" val="3607318627"/>
+      </p:ext>
+    </p:extLst>
+  </p:cSld>
+  <p:clrMapOvr>
+    <a:masterClrMapping/>
+  </p:clrMapOvr>
+</p:sld>
+</file>
+
+<file path=ppt/slides/slide14.xml><?xml version="1.0" encoding="utf-8"?>
+<p:sld xmlns:a="http://schemas.openxmlformats.org/drawingml/2006/main" xmlns:r="http://schemas.openxmlformats.org/officeDocument/2006/relationships" xmlns:p="http://schemas.openxmlformats.org/presentationml/2006/main">
+  <p:cSld>
+    <p:spTree>
+      <p:nvGrpSpPr>
         <p:cNvPr id="1" name="Shape 88"/>
         <p:cNvGrpSpPr/>
         <p:nvPr/>
@@ -15330,23 +15708,65 @@
           </a:bodyPr>
           <a:lstStyle/>
           <a:p>
-            <a:pPr marL="457200" lvl="0" indent="-228600" algn="l" rtl="0">
-              <a:lnSpc>
-                <a:spcPct val="115000"/>
-              </a:lnSpc>
-              <a:spcBef>
-                <a:spcPts val="0"/>
-              </a:spcBef>
-              <a:spcAft>
-                <a:spcPts val="0"/>
-              </a:spcAft>
-              <a:buClr>
-                <a:srgbClr val="434343"/>
-              </a:buClr>
-              <a:buSzPts val="2400"/>
+            <a:r>
+              <a:rPr lang="en-US" b="1" dirty="0"/>
+              <a:t>Fidelity:</a:t>
+            </a:r>
+            <a:r>
+              <a:rPr lang="en-US" dirty="0"/>
+              <a:t> how accurately they reflect the model.</a:t>
+            </a:r>
+          </a:p>
+          <a:p>
+            <a:pPr lvl="1"/>
+            <a:r>
+              <a:rPr lang="en-US" dirty="0"/>
+              <a:t>“Liking” an explanation versus it being correct and useful</a:t>
+            </a:r>
+          </a:p>
+          <a:p>
+            <a:pPr marL="565150" lvl="1" indent="0">
               <a:buNone/>
             </a:pPr>
-            <a:endParaRPr/>
+            <a:endParaRPr lang="en-US" dirty="0"/>
+          </a:p>
+          <a:p>
+            <a:r>
+              <a:rPr lang="en-US" b="1" dirty="0"/>
+              <a:t>Comprehensibility:</a:t>
+            </a:r>
+            <a:r>
+              <a:rPr lang="en-US" dirty="0"/>
+              <a:t> how well humans grasp them.</a:t>
+            </a:r>
+          </a:p>
+          <a:p>
+            <a:pPr lvl="1"/>
+            <a:r>
+              <a:rPr lang="en-US" dirty="0"/>
+              <a:t>Correct vs understandable</a:t>
+            </a:r>
+          </a:p>
+          <a:p>
+            <a:pPr lvl="1"/>
+            <a:endParaRPr lang="en-US" dirty="0"/>
+          </a:p>
+          <a:p>
+            <a:r>
+              <a:rPr lang="en-US" b="1" dirty="0"/>
+              <a:t>Usefulness:</a:t>
+            </a:r>
+            <a:r>
+              <a:rPr lang="en-US" dirty="0"/>
+              <a:t> how well they support a goal (debugging, intervention, regulation).</a:t>
+            </a:r>
+          </a:p>
+          <a:p>
+            <a:pPr lvl="1"/>
+            <a:r>
+              <a:rPr lang="en-US" dirty="0"/>
+              <a:t>Correct and understandable vs usable</a:t>
+            </a:r>
           </a:p>
         </p:txBody>
       </p:sp>
@@ -15355,10 +15775,283 @@
   <p:clrMapOvr>
     <a:masterClrMapping/>
   </p:clrMapOvr>
+  <p:timing>
+    <p:tnLst>
+      <p:par>
+        <p:cTn id="1" dur="indefinite" restart="never" nodeType="tmRoot">
+          <p:childTnLst>
+            <p:seq concurrent="1" nextAc="seek">
+              <p:cTn id="2" dur="indefinite" nodeType="mainSeq">
+                <p:childTnLst>
+                  <p:par>
+                    <p:cTn id="3" fill="hold">
+                      <p:stCondLst>
+                        <p:cond delay="indefinite"/>
+                      </p:stCondLst>
+                      <p:childTnLst>
+                        <p:par>
+                          <p:cTn id="4" fill="hold">
+                            <p:stCondLst>
+                              <p:cond delay="0"/>
+                            </p:stCondLst>
+                            <p:childTnLst>
+                              <p:par>
+                                <p:cTn id="5" presetID="1" presetClass="entr" presetSubtype="0" fill="hold" grpId="0" nodeType="clickEffect">
+                                  <p:stCondLst>
+                                    <p:cond delay="0"/>
+                                  </p:stCondLst>
+                                  <p:childTnLst>
+                                    <p:set>
+                                      <p:cBhvr>
+                                        <p:cTn id="6" dur="1" fill="hold">
+                                          <p:stCondLst>
+                                            <p:cond delay="0"/>
+                                          </p:stCondLst>
+                                        </p:cTn>
+                                        <p:tgtEl>
+                                          <p:spTgt spid="90">
+                                            <p:txEl>
+                                              <p:pRg st="0" end="0"/>
+                                            </p:txEl>
+                                          </p:spTgt>
+                                        </p:tgtEl>
+                                        <p:attrNameLst>
+                                          <p:attrName>style.visibility</p:attrName>
+                                        </p:attrNameLst>
+                                      </p:cBhvr>
+                                      <p:to>
+                                        <p:strVal val="visible"/>
+                                      </p:to>
+                                    </p:set>
+                                  </p:childTnLst>
+                                </p:cTn>
+                              </p:par>
+                              <p:par>
+                                <p:cTn id="7" presetID="1" presetClass="entr" presetSubtype="0" fill="hold" grpId="0" nodeType="withEffect">
+                                  <p:stCondLst>
+                                    <p:cond delay="0"/>
+                                  </p:stCondLst>
+                                  <p:childTnLst>
+                                    <p:set>
+                                      <p:cBhvr>
+                                        <p:cTn id="8" dur="1" fill="hold">
+                                          <p:stCondLst>
+                                            <p:cond delay="0"/>
+                                          </p:stCondLst>
+                                        </p:cTn>
+                                        <p:tgtEl>
+                                          <p:spTgt spid="90">
+                                            <p:txEl>
+                                              <p:pRg st="1" end="1"/>
+                                            </p:txEl>
+                                          </p:spTgt>
+                                        </p:tgtEl>
+                                        <p:attrNameLst>
+                                          <p:attrName>style.visibility</p:attrName>
+                                        </p:attrNameLst>
+                                      </p:cBhvr>
+                                      <p:to>
+                                        <p:strVal val="visible"/>
+                                      </p:to>
+                                    </p:set>
+                                  </p:childTnLst>
+                                </p:cTn>
+                              </p:par>
+                            </p:childTnLst>
+                          </p:cTn>
+                        </p:par>
+                      </p:childTnLst>
+                    </p:cTn>
+                  </p:par>
+                  <p:par>
+                    <p:cTn id="9" fill="hold">
+                      <p:stCondLst>
+                        <p:cond delay="indefinite"/>
+                      </p:stCondLst>
+                      <p:childTnLst>
+                        <p:par>
+                          <p:cTn id="10" fill="hold">
+                            <p:stCondLst>
+                              <p:cond delay="0"/>
+                            </p:stCondLst>
+                            <p:childTnLst>
+                              <p:par>
+                                <p:cTn id="11" presetID="1" presetClass="entr" presetSubtype="0" fill="hold" grpId="0" nodeType="clickEffect">
+                                  <p:stCondLst>
+                                    <p:cond delay="0"/>
+                                  </p:stCondLst>
+                                  <p:childTnLst>
+                                    <p:set>
+                                      <p:cBhvr>
+                                        <p:cTn id="12" dur="1" fill="hold">
+                                          <p:stCondLst>
+                                            <p:cond delay="0"/>
+                                          </p:stCondLst>
+                                        </p:cTn>
+                                        <p:tgtEl>
+                                          <p:spTgt spid="90">
+                                            <p:txEl>
+                                              <p:pRg st="3" end="3"/>
+                                            </p:txEl>
+                                          </p:spTgt>
+                                        </p:tgtEl>
+                                        <p:attrNameLst>
+                                          <p:attrName>style.visibility</p:attrName>
+                                        </p:attrNameLst>
+                                      </p:cBhvr>
+                                      <p:to>
+                                        <p:strVal val="visible"/>
+                                      </p:to>
+                                    </p:set>
+                                  </p:childTnLst>
+                                </p:cTn>
+                              </p:par>
+                              <p:par>
+                                <p:cTn id="13" presetID="1" presetClass="entr" presetSubtype="0" fill="hold" grpId="0" nodeType="withEffect">
+                                  <p:stCondLst>
+                                    <p:cond delay="0"/>
+                                  </p:stCondLst>
+                                  <p:childTnLst>
+                                    <p:set>
+                                      <p:cBhvr>
+                                        <p:cTn id="14" dur="1" fill="hold">
+                                          <p:stCondLst>
+                                            <p:cond delay="0"/>
+                                          </p:stCondLst>
+                                        </p:cTn>
+                                        <p:tgtEl>
+                                          <p:spTgt spid="90">
+                                            <p:txEl>
+                                              <p:pRg st="4" end="4"/>
+                                            </p:txEl>
+                                          </p:spTgt>
+                                        </p:tgtEl>
+                                        <p:attrNameLst>
+                                          <p:attrName>style.visibility</p:attrName>
+                                        </p:attrNameLst>
+                                      </p:cBhvr>
+                                      <p:to>
+                                        <p:strVal val="visible"/>
+                                      </p:to>
+                                    </p:set>
+                                  </p:childTnLst>
+                                </p:cTn>
+                              </p:par>
+                            </p:childTnLst>
+                          </p:cTn>
+                        </p:par>
+                      </p:childTnLst>
+                    </p:cTn>
+                  </p:par>
+                  <p:par>
+                    <p:cTn id="15" fill="hold">
+                      <p:stCondLst>
+                        <p:cond delay="indefinite"/>
+                      </p:stCondLst>
+                      <p:childTnLst>
+                        <p:par>
+                          <p:cTn id="16" fill="hold">
+                            <p:stCondLst>
+                              <p:cond delay="0"/>
+                            </p:stCondLst>
+                            <p:childTnLst>
+                              <p:par>
+                                <p:cTn id="17" presetID="1" presetClass="entr" presetSubtype="0" fill="hold" grpId="0" nodeType="clickEffect">
+                                  <p:stCondLst>
+                                    <p:cond delay="0"/>
+                                  </p:stCondLst>
+                                  <p:childTnLst>
+                                    <p:set>
+                                      <p:cBhvr>
+                                        <p:cTn id="18" dur="1" fill="hold">
+                                          <p:stCondLst>
+                                            <p:cond delay="0"/>
+                                          </p:stCondLst>
+                                        </p:cTn>
+                                        <p:tgtEl>
+                                          <p:spTgt spid="90">
+                                            <p:txEl>
+                                              <p:pRg st="6" end="6"/>
+                                            </p:txEl>
+                                          </p:spTgt>
+                                        </p:tgtEl>
+                                        <p:attrNameLst>
+                                          <p:attrName>style.visibility</p:attrName>
+                                        </p:attrNameLst>
+                                      </p:cBhvr>
+                                      <p:to>
+                                        <p:strVal val="visible"/>
+                                      </p:to>
+                                    </p:set>
+                                  </p:childTnLst>
+                                </p:cTn>
+                              </p:par>
+                              <p:par>
+                                <p:cTn id="19" presetID="1" presetClass="entr" presetSubtype="0" fill="hold" grpId="0" nodeType="withEffect">
+                                  <p:stCondLst>
+                                    <p:cond delay="0"/>
+                                  </p:stCondLst>
+                                  <p:childTnLst>
+                                    <p:set>
+                                      <p:cBhvr>
+                                        <p:cTn id="20" dur="1" fill="hold">
+                                          <p:stCondLst>
+                                            <p:cond delay="0"/>
+                                          </p:stCondLst>
+                                        </p:cTn>
+                                        <p:tgtEl>
+                                          <p:spTgt spid="90">
+                                            <p:txEl>
+                                              <p:pRg st="7" end="7"/>
+                                            </p:txEl>
+                                          </p:spTgt>
+                                        </p:tgtEl>
+                                        <p:attrNameLst>
+                                          <p:attrName>style.visibility</p:attrName>
+                                        </p:attrNameLst>
+                                      </p:cBhvr>
+                                      <p:to>
+                                        <p:strVal val="visible"/>
+                                      </p:to>
+                                    </p:set>
+                                  </p:childTnLst>
+                                </p:cTn>
+                              </p:par>
+                            </p:childTnLst>
+                          </p:cTn>
+                        </p:par>
+                      </p:childTnLst>
+                    </p:cTn>
+                  </p:par>
+                </p:childTnLst>
+              </p:cTn>
+              <p:prevCondLst>
+                <p:cond evt="onPrev" delay="0">
+                  <p:tgtEl>
+                    <p:sldTgt/>
+                  </p:tgtEl>
+                </p:cond>
+              </p:prevCondLst>
+              <p:nextCondLst>
+                <p:cond evt="onNext" delay="0">
+                  <p:tgtEl>
+                    <p:sldTgt/>
+                  </p:tgtEl>
+                </p:cond>
+              </p:nextCondLst>
+            </p:seq>
+          </p:childTnLst>
+        </p:cTn>
+      </p:par>
+    </p:tnLst>
+    <p:bldLst>
+      <p:bldP spid="90" grpId="0" build="p"/>
+    </p:bldLst>
+  </p:timing>
 </p:sld>
 </file>
 
-<file path=ppt/slides/slide12.xml><?xml version="1.0" encoding="utf-8"?>
+<file path=ppt/slides/slide15.xml><?xml version="1.0" encoding="utf-8"?>
 <p:sld xmlns:a="http://schemas.openxmlformats.org/drawingml/2006/main" xmlns:r="http://schemas.openxmlformats.org/officeDocument/2006/relationships" xmlns:p="http://schemas.openxmlformats.org/presentationml/2006/main" show="0">
   <p:cSld>
     <p:spTree>
@@ -15557,7 +16250,7 @@
 </p:sld>
 </file>
 
-<file path=ppt/slides/slide13.xml><?xml version="1.0" encoding="utf-8"?>
+<file path=ppt/slides/slide16.xml><?xml version="1.0" encoding="utf-8"?>
 <p:sld xmlns:a="http://schemas.openxmlformats.org/drawingml/2006/main" xmlns:r="http://schemas.openxmlformats.org/officeDocument/2006/relationships" xmlns:p="http://schemas.openxmlformats.org/presentationml/2006/main">
   <p:cSld>
     <p:spTree>
@@ -15689,7 +16382,7 @@
 </p:sld>
 </file>
 
-<file path=ppt/slides/slide14.xml><?xml version="1.0" encoding="utf-8"?>
+<file path=ppt/slides/slide17.xml><?xml version="1.0" encoding="utf-8"?>
 <p:sld xmlns:a="http://schemas.openxmlformats.org/drawingml/2006/main" xmlns:r="http://schemas.openxmlformats.org/officeDocument/2006/relationships" xmlns:p="http://schemas.openxmlformats.org/presentationml/2006/main">
   <p:cSld>
     <p:spTree>
@@ -16115,7 +16808,7 @@
 </p:sld>
 </file>
 
-<file path=ppt/slides/slide15.xml><?xml version="1.0" encoding="utf-8"?>
+<file path=ppt/slides/slide18.xml><?xml version="1.0" encoding="utf-8"?>
 <p:sld xmlns:a="http://schemas.openxmlformats.org/drawingml/2006/main" xmlns:r="http://schemas.openxmlformats.org/officeDocument/2006/relationships" xmlns:p="http://schemas.openxmlformats.org/presentationml/2006/main">
   <p:cSld>
     <p:spTree>
@@ -16633,7 +17326,7 @@
 </p:sld>
 </file>
 
-<file path=ppt/slides/slide16.xml><?xml version="1.0" encoding="utf-8"?>
+<file path=ppt/slides/slide19.xml><?xml version="1.0" encoding="utf-8"?>
 <p:sld xmlns:a="http://schemas.openxmlformats.org/drawingml/2006/main" xmlns:r="http://schemas.openxmlformats.org/officeDocument/2006/relationships" xmlns:p="http://schemas.openxmlformats.org/presentationml/2006/main">
   <p:cSld>
     <p:spTree>
@@ -16877,7 +17570,136 @@
 </p:sld>
 </file>
 
-<file path=ppt/slides/slide17.xml><?xml version="1.0" encoding="utf-8"?>
+<file path=ppt/slides/slide2.xml><?xml version="1.0" encoding="utf-8"?>
+<p:sld xmlns:a="http://schemas.openxmlformats.org/drawingml/2006/main" xmlns:r="http://schemas.openxmlformats.org/officeDocument/2006/relationships" xmlns:p="http://schemas.openxmlformats.org/presentationml/2006/main">
+  <p:cSld>
+    <p:spTree>
+      <p:nvGrpSpPr>
+        <p:cNvPr id="1" name=""/>
+        <p:cNvGrpSpPr/>
+        <p:nvPr/>
+      </p:nvGrpSpPr>
+      <p:grpSpPr>
+        <a:xfrm>
+          <a:off x="0" y="0"/>
+          <a:ext cx="0" cy="0"/>
+          <a:chOff x="0" y="0"/>
+          <a:chExt cx="0" cy="0"/>
+        </a:xfrm>
+      </p:grpSpPr>
+      <p:sp>
+        <p:nvSpPr>
+          <p:cNvPr id="2" name="Title 1">
+            <a:extLst>
+              <a:ext uri="{FF2B5EF4-FFF2-40B4-BE49-F238E27FC236}">
+                <a16:creationId xmlns:a16="http://schemas.microsoft.com/office/drawing/2014/main" id="{94CF2A94-A63F-6149-AA28-2E35B60E3D3E}"/>
+              </a:ext>
+            </a:extLst>
+          </p:cNvPr>
+          <p:cNvSpPr>
+            <a:spLocks noGrp="1"/>
+          </p:cNvSpPr>
+          <p:nvPr>
+            <p:ph type="title"/>
+          </p:nvPr>
+        </p:nvSpPr>
+        <p:spPr/>
+        <p:txBody>
+          <a:bodyPr/>
+          <a:lstStyle/>
+          <a:p>
+            <a:endParaRPr lang="en-US"/>
+          </a:p>
+        </p:txBody>
+      </p:sp>
+      <p:graphicFrame>
+        <p:nvGraphicFramePr>
+          <p:cNvPr id="3" name="Diagram 2">
+            <a:extLst>
+              <a:ext uri="{FF2B5EF4-FFF2-40B4-BE49-F238E27FC236}">
+                <a16:creationId xmlns:a16="http://schemas.microsoft.com/office/drawing/2014/main" id="{8E902576-68A9-6E48-B0FE-5B1889953DC8}"/>
+              </a:ext>
+            </a:extLst>
+          </p:cNvPr>
+          <p:cNvGraphicFramePr/>
+          <p:nvPr/>
+        </p:nvGraphicFramePr>
+        <p:xfrm>
+          <a:off x="180467" y="0"/>
+          <a:ext cx="11776400" cy="6858000"/>
+        </p:xfrm>
+        <a:graphic>
+          <a:graphicData uri="http://schemas.openxmlformats.org/drawingml/2006/diagram">
+            <dgm:relIds xmlns:dgm="http://schemas.openxmlformats.org/drawingml/2006/diagram" xmlns:r="http://schemas.openxmlformats.org/officeDocument/2006/relationships" r:dm="rId2" r:lo="rId3" r:qs="rId4" r:cs="rId5"/>
+          </a:graphicData>
+        </a:graphic>
+      </p:graphicFrame>
+      <p:sp>
+        <p:nvSpPr>
+          <p:cNvPr id="4" name="Rectangle 3">
+            <a:extLst>
+              <a:ext uri="{FF2B5EF4-FFF2-40B4-BE49-F238E27FC236}">
+                <a16:creationId xmlns:a16="http://schemas.microsoft.com/office/drawing/2014/main" id="{E2C99BF2-C81A-5246-89D3-E49BCDCAD699}"/>
+              </a:ext>
+            </a:extLst>
+          </p:cNvPr>
+          <p:cNvSpPr/>
+          <p:nvPr/>
+        </p:nvSpPr>
+        <p:spPr>
+          <a:xfrm>
+            <a:off x="6388892" y="2534144"/>
+            <a:ext cx="2534195" cy="1789611"/>
+          </a:xfrm>
+          <a:prstGeom prst="rect">
+            <a:avLst/>
+          </a:prstGeom>
+          <a:noFill/>
+          <a:ln w="76200">
+            <a:solidFill>
+              <a:srgbClr val="C00000"/>
+            </a:solidFill>
+          </a:ln>
+        </p:spPr>
+        <p:style>
+          <a:lnRef idx="2">
+            <a:schemeClr val="accent1">
+              <a:shade val="50000"/>
+            </a:schemeClr>
+          </a:lnRef>
+          <a:fillRef idx="1">
+            <a:schemeClr val="accent1"/>
+          </a:fillRef>
+          <a:effectRef idx="0">
+            <a:schemeClr val="accent1"/>
+          </a:effectRef>
+          <a:fontRef idx="minor">
+            <a:schemeClr val="lt1"/>
+          </a:fontRef>
+        </p:style>
+        <p:txBody>
+          <a:bodyPr rtlCol="0" anchor="ctr"/>
+          <a:lstStyle/>
+          <a:p>
+            <a:pPr algn="ctr"/>
+            <a:endParaRPr lang="en-US"/>
+          </a:p>
+        </p:txBody>
+      </p:sp>
+    </p:spTree>
+    <p:extLst>
+      <p:ext uri="{BB962C8B-B14F-4D97-AF65-F5344CB8AC3E}">
+        <p14:creationId xmlns:p14="http://schemas.microsoft.com/office/powerpoint/2010/main" val="1582547232"/>
+      </p:ext>
+    </p:extLst>
+  </p:cSld>
+  <p:clrMapOvr>
+    <a:masterClrMapping/>
+  </p:clrMapOvr>
+</p:sld>
+</file>
+
+<file path=ppt/slides/slide20.xml><?xml version="1.0" encoding="utf-8"?>
 <p:sld xmlns:a="http://schemas.openxmlformats.org/drawingml/2006/main" xmlns:r="http://schemas.openxmlformats.org/officeDocument/2006/relationships" xmlns:p="http://schemas.openxmlformats.org/presentationml/2006/main">
   <p:cSld>
     <p:spTree>
@@ -16940,12 +17762,8 @@
               <a:buNone/>
             </a:pPr>
             <a:r>
-              <a:rPr lang="en-US" sz="4320" dirty="0" err="1"/>
-              <a:t>Explainability</a:t>
-            </a:r>
-            <a:r>
               <a:rPr lang="en-US" sz="4320" dirty="0"/>
-              <a:t> vs Accuracy?</a:t>
+              <a:t>Explainability vs “Accuracy”?</a:t>
             </a:r>
             <a:endParaRPr dirty="0"/>
           </a:p>
@@ -17087,8 +17905,8 @@
         </p:nvSpPr>
         <p:spPr>
           <a:xfrm rot="16200000">
-            <a:off x="1961169" y="3167389"/>
-            <a:ext cx="1662635" cy="523220"/>
+            <a:off x="755714" y="3228943"/>
+            <a:ext cx="4073551" cy="400110"/>
           </a:xfrm>
           <a:prstGeom prst="rect">
             <a:avLst/>
@@ -17102,8 +17920,8 @@
           <a:lstStyle/>
           <a:p>
             <a:r>
-              <a:rPr lang="en-US" sz="2800" dirty="0"/>
-              <a:t>Accuracy</a:t>
+              <a:rPr lang="en-US" sz="2000" dirty="0"/>
+              <a:t>“Accuracy”  (P@10% for example)</a:t>
             </a:r>
           </a:p>
         </p:txBody>
@@ -17214,7 +18032,7 @@
 </p:sld>
 </file>
 
-<file path=ppt/slides/slide18.xml><?xml version="1.0" encoding="utf-8"?>
+<file path=ppt/slides/slide21.xml><?xml version="1.0" encoding="utf-8"?>
 <p:sld xmlns:a="http://schemas.openxmlformats.org/drawingml/2006/main" xmlns:r="http://schemas.openxmlformats.org/officeDocument/2006/relationships" xmlns:p="http://schemas.openxmlformats.org/presentationml/2006/main">
   <p:cSld>
     <p:spTree>
@@ -17644,7 +18462,7 @@
 </p:sld>
 </file>
 
-<file path=ppt/slides/slide19.xml><?xml version="1.0" encoding="utf-8"?>
+<file path=ppt/slides/slide22.xml><?xml version="1.0" encoding="utf-8"?>
 <p:sld xmlns:a="http://schemas.openxmlformats.org/drawingml/2006/main" xmlns:r="http://schemas.openxmlformats.org/officeDocument/2006/relationships" xmlns:p="http://schemas.openxmlformats.org/presentationml/2006/main">
   <p:cSld>
     <p:spTree>
@@ -18890,136 +19708,7 @@
 </p:sld>
 </file>
 
-<file path=ppt/slides/slide2.xml><?xml version="1.0" encoding="utf-8"?>
-<p:sld xmlns:a="http://schemas.openxmlformats.org/drawingml/2006/main" xmlns:r="http://schemas.openxmlformats.org/officeDocument/2006/relationships" xmlns:p="http://schemas.openxmlformats.org/presentationml/2006/main">
-  <p:cSld>
-    <p:spTree>
-      <p:nvGrpSpPr>
-        <p:cNvPr id="1" name=""/>
-        <p:cNvGrpSpPr/>
-        <p:nvPr/>
-      </p:nvGrpSpPr>
-      <p:grpSpPr>
-        <a:xfrm>
-          <a:off x="0" y="0"/>
-          <a:ext cx="0" cy="0"/>
-          <a:chOff x="0" y="0"/>
-          <a:chExt cx="0" cy="0"/>
-        </a:xfrm>
-      </p:grpSpPr>
-      <p:sp>
-        <p:nvSpPr>
-          <p:cNvPr id="2" name="Title 1">
-            <a:extLst>
-              <a:ext uri="{FF2B5EF4-FFF2-40B4-BE49-F238E27FC236}">
-                <a16:creationId xmlns:a16="http://schemas.microsoft.com/office/drawing/2014/main" id="{94CF2A94-A63F-6149-AA28-2E35B60E3D3E}"/>
-              </a:ext>
-            </a:extLst>
-          </p:cNvPr>
-          <p:cNvSpPr>
-            <a:spLocks noGrp="1"/>
-          </p:cNvSpPr>
-          <p:nvPr>
-            <p:ph type="title"/>
-          </p:nvPr>
-        </p:nvSpPr>
-        <p:spPr/>
-        <p:txBody>
-          <a:bodyPr/>
-          <a:lstStyle/>
-          <a:p>
-            <a:endParaRPr lang="en-US"/>
-          </a:p>
-        </p:txBody>
-      </p:sp>
-      <p:graphicFrame>
-        <p:nvGraphicFramePr>
-          <p:cNvPr id="3" name="Diagram 2">
-            <a:extLst>
-              <a:ext uri="{FF2B5EF4-FFF2-40B4-BE49-F238E27FC236}">
-                <a16:creationId xmlns:a16="http://schemas.microsoft.com/office/drawing/2014/main" id="{8E902576-68A9-6E48-B0FE-5B1889953DC8}"/>
-              </a:ext>
-            </a:extLst>
-          </p:cNvPr>
-          <p:cNvGraphicFramePr/>
-          <p:nvPr/>
-        </p:nvGraphicFramePr>
-        <p:xfrm>
-          <a:off x="180467" y="0"/>
-          <a:ext cx="11776400" cy="6858000"/>
-        </p:xfrm>
-        <a:graphic>
-          <a:graphicData uri="http://schemas.openxmlformats.org/drawingml/2006/diagram">
-            <dgm:relIds xmlns:dgm="http://schemas.openxmlformats.org/drawingml/2006/diagram" xmlns:r="http://schemas.openxmlformats.org/officeDocument/2006/relationships" r:dm="rId2" r:lo="rId3" r:qs="rId4" r:cs="rId5"/>
-          </a:graphicData>
-        </a:graphic>
-      </p:graphicFrame>
-      <p:sp>
-        <p:nvSpPr>
-          <p:cNvPr id="4" name="Rectangle 3">
-            <a:extLst>
-              <a:ext uri="{FF2B5EF4-FFF2-40B4-BE49-F238E27FC236}">
-                <a16:creationId xmlns:a16="http://schemas.microsoft.com/office/drawing/2014/main" id="{E2C99BF2-C81A-5246-89D3-E49BCDCAD699}"/>
-              </a:ext>
-            </a:extLst>
-          </p:cNvPr>
-          <p:cNvSpPr/>
-          <p:nvPr/>
-        </p:nvSpPr>
-        <p:spPr>
-          <a:xfrm>
-            <a:off x="6388892" y="2534144"/>
-            <a:ext cx="2534195" cy="1789611"/>
-          </a:xfrm>
-          <a:prstGeom prst="rect">
-            <a:avLst/>
-          </a:prstGeom>
-          <a:noFill/>
-          <a:ln w="76200">
-            <a:solidFill>
-              <a:srgbClr val="C00000"/>
-            </a:solidFill>
-          </a:ln>
-        </p:spPr>
-        <p:style>
-          <a:lnRef idx="2">
-            <a:schemeClr val="accent1">
-              <a:shade val="50000"/>
-            </a:schemeClr>
-          </a:lnRef>
-          <a:fillRef idx="1">
-            <a:schemeClr val="accent1"/>
-          </a:fillRef>
-          <a:effectRef idx="0">
-            <a:schemeClr val="accent1"/>
-          </a:effectRef>
-          <a:fontRef idx="minor">
-            <a:schemeClr val="lt1"/>
-          </a:fontRef>
-        </p:style>
-        <p:txBody>
-          <a:bodyPr rtlCol="0" anchor="ctr"/>
-          <a:lstStyle/>
-          <a:p>
-            <a:pPr algn="ctr"/>
-            <a:endParaRPr lang="en-US"/>
-          </a:p>
-        </p:txBody>
-      </p:sp>
-    </p:spTree>
-    <p:extLst>
-      <p:ext uri="{BB962C8B-B14F-4D97-AF65-F5344CB8AC3E}">
-        <p14:creationId xmlns:p14="http://schemas.microsoft.com/office/powerpoint/2010/main" val="1582547232"/>
-      </p:ext>
-    </p:extLst>
-  </p:cSld>
-  <p:clrMapOvr>
-    <a:masterClrMapping/>
-  </p:clrMapOvr>
-</p:sld>
-</file>
-
-<file path=ppt/slides/slide20.xml><?xml version="1.0" encoding="utf-8"?>
+<file path=ppt/slides/slide23.xml><?xml version="1.0" encoding="utf-8"?>
 <p:sld xmlns:a="http://schemas.openxmlformats.org/drawingml/2006/main" xmlns:r="http://schemas.openxmlformats.org/officeDocument/2006/relationships" xmlns:p="http://schemas.openxmlformats.org/presentationml/2006/main">
   <p:cSld>
     <p:spTree>
@@ -20358,7 +21047,7 @@
 </p:sld>
 </file>
 
-<file path=ppt/slides/slide21.xml><?xml version="1.0" encoding="utf-8"?>
+<file path=ppt/slides/slide24.xml><?xml version="1.0" encoding="utf-8"?>
 <p:sld xmlns:a="http://schemas.openxmlformats.org/drawingml/2006/main" xmlns:r="http://schemas.openxmlformats.org/officeDocument/2006/relationships" xmlns:p="http://schemas.openxmlformats.org/presentationml/2006/main">
   <p:cSld>
     <p:spTree>
@@ -20466,7 +21155,7 @@
 </p:sld>
 </file>
 
-<file path=ppt/slides/slide22.xml><?xml version="1.0" encoding="utf-8"?>
+<file path=ppt/slides/slide25.xml><?xml version="1.0" encoding="utf-8"?>
 <p:sld xmlns:a="http://schemas.openxmlformats.org/drawingml/2006/main" xmlns:r="http://schemas.openxmlformats.org/officeDocument/2006/relationships" xmlns:p="http://schemas.openxmlformats.org/presentationml/2006/main">
   <p:cSld>
     <p:spTree>
@@ -20696,7 +21385,7 @@
 </p:sld>
 </file>
 
-<file path=ppt/slides/slide23.xml><?xml version="1.0" encoding="utf-8"?>
+<file path=ppt/slides/slide26.xml><?xml version="1.0" encoding="utf-8"?>
 <p:sld xmlns:a="http://schemas.openxmlformats.org/drawingml/2006/main" xmlns:r="http://schemas.openxmlformats.org/officeDocument/2006/relationships" xmlns:p="http://schemas.openxmlformats.org/presentationml/2006/main">
   <p:cSld>
     <p:spTree>
@@ -20800,7 +21489,7 @@
 </p:sld>
 </file>
 
-<file path=ppt/slides/slide24.xml><?xml version="1.0" encoding="utf-8"?>
+<file path=ppt/slides/slide27.xml><?xml version="1.0" encoding="utf-8"?>
 <p:sld xmlns:a="http://schemas.openxmlformats.org/drawingml/2006/main" xmlns:r="http://schemas.openxmlformats.org/officeDocument/2006/relationships" xmlns:p="http://schemas.openxmlformats.org/presentationml/2006/main" show="0">
   <p:cSld>
     <p:spTree>
@@ -20909,7 +21598,7 @@
 </p:sld>
 </file>
 
-<file path=ppt/slides/slide25.xml><?xml version="1.0" encoding="utf-8"?>
+<file path=ppt/slides/slide28.xml><?xml version="1.0" encoding="utf-8"?>
 <p:sld xmlns:a="http://schemas.openxmlformats.org/drawingml/2006/main" xmlns:r="http://schemas.openxmlformats.org/officeDocument/2006/relationships" xmlns:p="http://schemas.openxmlformats.org/presentationml/2006/main">
   <p:cSld>
     <p:spTree>
@@ -21699,7 +22388,7 @@
 </p:sld>
 </file>
 
-<file path=ppt/slides/slide26.xml><?xml version="1.0" encoding="utf-8"?>
+<file path=ppt/slides/slide29.xml><?xml version="1.0" encoding="utf-8"?>
 <p:sld xmlns:a="http://schemas.openxmlformats.org/drawingml/2006/main" xmlns:r="http://schemas.openxmlformats.org/officeDocument/2006/relationships" xmlns:p="http://schemas.openxmlformats.org/presentationml/2006/main">
   <p:cSld>
     <p:spTree>
@@ -21851,7 +22540,272 @@
 </p:sld>
 </file>
 
-<file path=ppt/slides/slide27.xml><?xml version="1.0" encoding="utf-8"?>
+<file path=ppt/slides/slide3.xml><?xml version="1.0" encoding="utf-8"?>
+<p:sld xmlns:a="http://schemas.openxmlformats.org/drawingml/2006/main" xmlns:r="http://schemas.openxmlformats.org/officeDocument/2006/relationships" xmlns:p="http://schemas.openxmlformats.org/presentationml/2006/main">
+  <p:cSld>
+    <p:spTree>
+      <p:nvGrpSpPr>
+        <p:cNvPr id="1" name="Shape 59"/>
+        <p:cNvGrpSpPr/>
+        <p:nvPr/>
+      </p:nvGrpSpPr>
+      <p:grpSpPr>
+        <a:xfrm>
+          <a:off x="0" y="0"/>
+          <a:ext cx="0" cy="0"/>
+          <a:chOff x="0" y="0"/>
+          <a:chExt cx="0" cy="0"/>
+        </a:xfrm>
+      </p:grpSpPr>
+      <p:sp>
+        <p:nvSpPr>
+          <p:cNvPr id="60" name="Google Shape;60;p24"/>
+          <p:cNvSpPr txBox="1">
+            <a:spLocks noGrp="1"/>
+          </p:cNvSpPr>
+          <p:nvPr>
+            <p:ph type="title"/>
+          </p:nvPr>
+        </p:nvSpPr>
+        <p:spPr>
+          <a:xfrm>
+            <a:off x="415600" y="86563"/>
+            <a:ext cx="11360700" cy="763500"/>
+          </a:xfrm>
+          <a:prstGeom prst="rect">
+            <a:avLst/>
+          </a:prstGeom>
+          <a:noFill/>
+          <a:ln>
+            <a:noFill/>
+          </a:ln>
+        </p:spPr>
+        <p:txBody>
+          <a:bodyPr spcFirstLastPara="1" wrap="square" lIns="121900" tIns="121900" rIns="121900" bIns="121900" anchor="t" anchorCtr="0">
+            <a:noAutofit/>
+          </a:bodyPr>
+          <a:lstStyle/>
+          <a:p>
+            <a:pPr marL="0" lvl="0" indent="0" algn="l" rtl="0">
+              <a:lnSpc>
+                <a:spcPct val="100000"/>
+              </a:lnSpc>
+              <a:spcBef>
+                <a:spcPts val="0"/>
+              </a:spcBef>
+              <a:spcAft>
+                <a:spcPts val="0"/>
+              </a:spcAft>
+              <a:buClr>
+                <a:srgbClr val="FFFFFF"/>
+              </a:buClr>
+              <a:buSzPts val="3700"/>
+              <a:buNone/>
+            </a:pPr>
+            <a:r>
+              <a:rPr lang="en-US"/>
+              <a:t>What we’ll cover today</a:t>
+            </a:r>
+            <a:endParaRPr/>
+          </a:p>
+        </p:txBody>
+      </p:sp>
+      <p:sp>
+        <p:nvSpPr>
+          <p:cNvPr id="61" name="Google Shape;61;p24"/>
+          <p:cNvSpPr txBox="1">
+            <a:spLocks noGrp="1"/>
+          </p:cNvSpPr>
+          <p:nvPr>
+            <p:ph type="body" idx="1"/>
+          </p:nvPr>
+        </p:nvSpPr>
+        <p:spPr>
+          <a:xfrm>
+            <a:off x="415600" y="1536633"/>
+            <a:ext cx="11360700" cy="4555200"/>
+          </a:xfrm>
+          <a:prstGeom prst="rect">
+            <a:avLst/>
+          </a:prstGeom>
+          <a:noFill/>
+          <a:ln>
+            <a:noFill/>
+          </a:ln>
+        </p:spPr>
+        <p:txBody>
+          <a:bodyPr spcFirstLastPara="1" wrap="square" lIns="121900" tIns="121900" rIns="121900" bIns="121900" anchor="t" anchorCtr="0">
+            <a:normAutofit lnSpcReduction="10000"/>
+          </a:bodyPr>
+          <a:lstStyle/>
+          <a:p>
+            <a:pPr marL="457200" lvl="0" indent="-381000" algn="l" rtl="0">
+              <a:lnSpc>
+                <a:spcPct val="115000"/>
+              </a:lnSpc>
+              <a:spcBef>
+                <a:spcPts val="0"/>
+              </a:spcBef>
+              <a:spcAft>
+                <a:spcPts val="0"/>
+              </a:spcAft>
+              <a:buClr>
+                <a:srgbClr val="434343"/>
+              </a:buClr>
+              <a:buSzPts val="2400"/>
+              <a:buChar char="●"/>
+            </a:pPr>
+            <a:r>
+              <a:rPr lang="en-US" dirty="0"/>
+              <a:t>Understand different goals for interpretability</a:t>
+            </a:r>
+          </a:p>
+          <a:p>
+            <a:pPr marL="457200" lvl="0" indent="-381000" algn="l" rtl="0">
+              <a:lnSpc>
+                <a:spcPct val="115000"/>
+              </a:lnSpc>
+              <a:spcBef>
+                <a:spcPts val="0"/>
+              </a:spcBef>
+              <a:spcAft>
+                <a:spcPts val="0"/>
+              </a:spcAft>
+              <a:buClr>
+                <a:srgbClr val="434343"/>
+              </a:buClr>
+              <a:buSzPts val="2400"/>
+              <a:buChar char="●"/>
+            </a:pPr>
+            <a:endParaRPr lang="en-US" dirty="0"/>
+          </a:p>
+          <a:p>
+            <a:r>
+              <a:rPr lang="en-US" dirty="0"/>
+              <a:t>Types of Interpretability Methods</a:t>
+            </a:r>
+          </a:p>
+          <a:p>
+            <a:pPr marL="76200" indent="0">
+              <a:buNone/>
+            </a:pPr>
+            <a:endParaRPr lang="en-US" dirty="0"/>
+          </a:p>
+          <a:p>
+            <a:pPr marL="457200" lvl="0" indent="-381000" algn="l" rtl="0">
+              <a:lnSpc>
+                <a:spcPct val="115000"/>
+              </a:lnSpc>
+              <a:spcBef>
+                <a:spcPts val="0"/>
+              </a:spcBef>
+              <a:spcAft>
+                <a:spcPts val="0"/>
+              </a:spcAft>
+              <a:buClr>
+                <a:srgbClr val="434343"/>
+              </a:buClr>
+              <a:buSzPts val="2400"/>
+              <a:buChar char="●"/>
+            </a:pPr>
+            <a:r>
+              <a:rPr lang="en-US" dirty="0"/>
+              <a:t>Compare classical post-hoc interpretability tools (e.g., SHAP, LIME, PDPs) and model-intrinsic approaches (e.g., GAMs, monotonic models).</a:t>
+            </a:r>
+          </a:p>
+          <a:p>
+            <a:pPr marL="457200" lvl="0" indent="-381000" algn="l" rtl="0">
+              <a:lnSpc>
+                <a:spcPct val="115000"/>
+              </a:lnSpc>
+              <a:spcBef>
+                <a:spcPts val="0"/>
+              </a:spcBef>
+              <a:spcAft>
+                <a:spcPts val="0"/>
+              </a:spcAft>
+              <a:buClr>
+                <a:srgbClr val="434343"/>
+              </a:buClr>
+              <a:buSzPts val="2400"/>
+              <a:buChar char="●"/>
+            </a:pPr>
+            <a:endParaRPr lang="en-US" dirty="0"/>
+          </a:p>
+          <a:p>
+            <a:pPr marL="457200" lvl="0" indent="-381000" algn="l" rtl="0">
+              <a:lnSpc>
+                <a:spcPct val="115000"/>
+              </a:lnSpc>
+              <a:spcBef>
+                <a:spcPts val="0"/>
+              </a:spcBef>
+              <a:spcAft>
+                <a:spcPts val="0"/>
+              </a:spcAft>
+              <a:buClr>
+                <a:srgbClr val="434343"/>
+              </a:buClr>
+              <a:buSzPts val="2400"/>
+              <a:buChar char="●"/>
+            </a:pPr>
+            <a:r>
+              <a:rPr lang="en-US" dirty="0"/>
+              <a:t>Recognize interpretability challenges in complex deep models and LLMs.</a:t>
+            </a:r>
+          </a:p>
+          <a:p>
+            <a:pPr marL="457200" lvl="0" indent="-381000" algn="l" rtl="0">
+              <a:lnSpc>
+                <a:spcPct val="115000"/>
+              </a:lnSpc>
+              <a:spcBef>
+                <a:spcPts val="0"/>
+              </a:spcBef>
+              <a:spcAft>
+                <a:spcPts val="0"/>
+              </a:spcAft>
+              <a:buClr>
+                <a:srgbClr val="434343"/>
+              </a:buClr>
+              <a:buSzPts val="2400"/>
+              <a:buChar char="●"/>
+            </a:pPr>
+            <a:endParaRPr lang="en-US" dirty="0"/>
+          </a:p>
+          <a:p>
+            <a:pPr marL="457200" lvl="0" indent="-381000" algn="l" rtl="0">
+              <a:lnSpc>
+                <a:spcPct val="115000"/>
+              </a:lnSpc>
+              <a:spcBef>
+                <a:spcPts val="0"/>
+              </a:spcBef>
+              <a:spcAft>
+                <a:spcPts val="0"/>
+              </a:spcAft>
+              <a:buClr>
+                <a:srgbClr val="434343"/>
+              </a:buClr>
+              <a:buSzPts val="2400"/>
+              <a:buChar char="●"/>
+            </a:pPr>
+            <a:r>
+              <a:rPr lang="en-US" dirty="0"/>
+              <a:t>Apply interpretability tools to real-world use cases and understand their limitations.</a:t>
+            </a:r>
+          </a:p>
+        </p:txBody>
+      </p:sp>
+    </p:spTree>
+  </p:cSld>
+  <p:clrMapOvr>
+    <a:masterClrMapping/>
+  </p:clrMapOvr>
+</p:sld>
+</file>
+
+<file path=ppt/slides/slide30.xml><?xml version="1.0" encoding="utf-8"?>
 <p:sld xmlns:a="http://schemas.openxmlformats.org/drawingml/2006/main" xmlns:r="http://schemas.openxmlformats.org/officeDocument/2006/relationships" xmlns:p="http://schemas.openxmlformats.org/presentationml/2006/main">
   <p:cSld>
     <p:spTree>
@@ -22089,7 +23043,395 @@
 </p:sld>
 </file>
 
-<file path=ppt/slides/slide28.xml><?xml version="1.0" encoding="utf-8"?>
+<file path=ppt/slides/slide31.xml><?xml version="1.0" encoding="utf-8"?>
+<p:sld xmlns:a="http://schemas.openxmlformats.org/drawingml/2006/main" xmlns:r="http://schemas.openxmlformats.org/officeDocument/2006/relationships" xmlns:p="http://schemas.openxmlformats.org/presentationml/2006/main">
+  <p:cSld>
+    <p:spTree>
+      <p:nvGrpSpPr>
+        <p:cNvPr id="1" name=""/>
+        <p:cNvGrpSpPr/>
+        <p:nvPr/>
+      </p:nvGrpSpPr>
+      <p:grpSpPr>
+        <a:xfrm>
+          <a:off x="0" y="0"/>
+          <a:ext cx="0" cy="0"/>
+          <a:chOff x="0" y="0"/>
+          <a:chExt cx="0" cy="0"/>
+        </a:xfrm>
+      </p:grpSpPr>
+      <p:sp>
+        <p:nvSpPr>
+          <p:cNvPr id="2" name="Title 1">
+            <a:extLst>
+              <a:ext uri="{FF2B5EF4-FFF2-40B4-BE49-F238E27FC236}">
+                <a16:creationId xmlns:a16="http://schemas.microsoft.com/office/drawing/2014/main" id="{DF9D170B-7DB6-34AE-7826-A25DA8B214C4}"/>
+              </a:ext>
+            </a:extLst>
+          </p:cNvPr>
+          <p:cNvSpPr>
+            <a:spLocks noGrp="1"/>
+          </p:cNvSpPr>
+          <p:nvPr>
+            <p:ph type="title"/>
+          </p:nvPr>
+        </p:nvSpPr>
+        <p:spPr/>
+        <p:txBody>
+          <a:bodyPr/>
+          <a:lstStyle/>
+          <a:p>
+            <a:r>
+              <a:rPr lang="en-US" dirty="0"/>
+              <a:t>Interpretability in Deep Learning</a:t>
+            </a:r>
+          </a:p>
+        </p:txBody>
+      </p:sp>
+      <p:sp>
+        <p:nvSpPr>
+          <p:cNvPr id="3" name="Text Placeholder 2">
+            <a:extLst>
+              <a:ext uri="{FF2B5EF4-FFF2-40B4-BE49-F238E27FC236}">
+                <a16:creationId xmlns:a16="http://schemas.microsoft.com/office/drawing/2014/main" id="{0F831D4D-C57B-C299-686B-2CCC5548522E}"/>
+              </a:ext>
+            </a:extLst>
+          </p:cNvPr>
+          <p:cNvSpPr>
+            <a:spLocks noGrp="1"/>
+          </p:cNvSpPr>
+          <p:nvPr>
+            <p:ph type="body" idx="1"/>
+          </p:nvPr>
+        </p:nvSpPr>
+        <p:spPr/>
+        <p:txBody>
+          <a:bodyPr/>
+          <a:lstStyle/>
+          <a:p>
+            <a:r>
+              <a:rPr lang="en-US" dirty="0"/>
+              <a:t>Representation Interpretability vs Important features</a:t>
+            </a:r>
+          </a:p>
+          <a:p>
+            <a:endParaRPr lang="en-US" dirty="0"/>
+          </a:p>
+          <a:p>
+            <a:r>
+              <a:rPr lang="en-US" dirty="0"/>
+              <a:t>Inputs are high-dimensional (pixels, tokens, embeddings).</a:t>
+            </a:r>
+          </a:p>
+          <a:p>
+            <a:endParaRPr lang="en-US" dirty="0"/>
+          </a:p>
+          <a:p>
+            <a:r>
+              <a:rPr lang="en-US" dirty="0"/>
+              <a:t>Learned features are distributed and hierarchical.</a:t>
+            </a:r>
+          </a:p>
+          <a:p>
+            <a:endParaRPr lang="en-US" dirty="0"/>
+          </a:p>
+          <a:p>
+            <a:r>
+              <a:rPr lang="en-US" dirty="0"/>
+              <a:t>Internal activations don’t correspond directly to human-interpretable concepts.</a:t>
+            </a:r>
+          </a:p>
+          <a:p>
+            <a:pPr lvl="1"/>
+            <a:endParaRPr lang="en-US" dirty="0"/>
+          </a:p>
+        </p:txBody>
+      </p:sp>
+    </p:spTree>
+    <p:extLst>
+      <p:ext uri="{BB962C8B-B14F-4D97-AF65-F5344CB8AC3E}">
+        <p14:creationId xmlns:p14="http://schemas.microsoft.com/office/powerpoint/2010/main" val="202619873"/>
+      </p:ext>
+    </p:extLst>
+  </p:cSld>
+  <p:clrMapOvr>
+    <a:masterClrMapping/>
+  </p:clrMapOvr>
+</p:sld>
+</file>
+
+<file path=ppt/slides/slide32.xml><?xml version="1.0" encoding="utf-8"?>
+<p:sld xmlns:a="http://schemas.openxmlformats.org/drawingml/2006/main" xmlns:r="http://schemas.openxmlformats.org/officeDocument/2006/relationships" xmlns:p="http://schemas.openxmlformats.org/presentationml/2006/main">
+  <p:cSld>
+    <p:spTree>
+      <p:nvGrpSpPr>
+        <p:cNvPr id="1" name=""/>
+        <p:cNvGrpSpPr/>
+        <p:nvPr/>
+      </p:nvGrpSpPr>
+      <p:grpSpPr>
+        <a:xfrm>
+          <a:off x="0" y="0"/>
+          <a:ext cx="0" cy="0"/>
+          <a:chOff x="0" y="0"/>
+          <a:chExt cx="0" cy="0"/>
+        </a:xfrm>
+      </p:grpSpPr>
+      <p:sp>
+        <p:nvSpPr>
+          <p:cNvPr id="2" name="Title 1">
+            <a:extLst>
+              <a:ext uri="{FF2B5EF4-FFF2-40B4-BE49-F238E27FC236}">
+                <a16:creationId xmlns:a16="http://schemas.microsoft.com/office/drawing/2014/main" id="{1C9369E2-566C-2728-8D59-155CD935CFFB}"/>
+              </a:ext>
+            </a:extLst>
+          </p:cNvPr>
+          <p:cNvSpPr>
+            <a:spLocks noGrp="1"/>
+          </p:cNvSpPr>
+          <p:nvPr>
+            <p:ph type="title"/>
+          </p:nvPr>
+        </p:nvSpPr>
+        <p:spPr/>
+        <p:txBody>
+          <a:bodyPr/>
+          <a:lstStyle/>
+          <a:p>
+            <a:endParaRPr lang="en-US"/>
+          </a:p>
+        </p:txBody>
+      </p:sp>
+      <p:sp>
+        <p:nvSpPr>
+          <p:cNvPr id="3" name="Text Placeholder 2">
+            <a:extLst>
+              <a:ext uri="{FF2B5EF4-FFF2-40B4-BE49-F238E27FC236}">
+                <a16:creationId xmlns:a16="http://schemas.microsoft.com/office/drawing/2014/main" id="{8DF77C67-55D6-A510-ED69-62F80061EF8E}"/>
+              </a:ext>
+            </a:extLst>
+          </p:cNvPr>
+          <p:cNvSpPr>
+            <a:spLocks noGrp="1"/>
+          </p:cNvSpPr>
+          <p:nvPr>
+            <p:ph type="body" idx="1"/>
+          </p:nvPr>
+        </p:nvSpPr>
+        <p:spPr/>
+        <p:txBody>
+          <a:bodyPr/>
+          <a:lstStyle/>
+          <a:p>
+            <a:r>
+              <a:rPr lang="en-US" dirty="0"/>
+              <a:t>Saliency and Gradient-Based Methods</a:t>
+            </a:r>
+          </a:p>
+          <a:p>
+            <a:pPr lvl="1"/>
+            <a:r>
+              <a:rPr lang="en-US" dirty="0"/>
+              <a:t>Attribute importance to input features by measuring how small changes in input affect model output.</a:t>
+            </a:r>
+          </a:p>
+          <a:p>
+            <a:pPr marL="565150" lvl="1" indent="0">
+              <a:buNone/>
+            </a:pPr>
+            <a:endParaRPr lang="en-US" dirty="0"/>
+          </a:p>
+          <a:p>
+            <a:r>
+              <a:rPr lang="en-US" dirty="0"/>
+              <a:t>Example- and Influence-Based Methods</a:t>
+            </a:r>
+          </a:p>
+          <a:p>
+            <a:pPr lvl="1"/>
+            <a:r>
+              <a:rPr lang="en-US" dirty="0"/>
+              <a:t>explain </a:t>
+            </a:r>
+            <a:r>
+              <a:rPr lang="en-US" i="1" dirty="0"/>
+              <a:t>training examples</a:t>
+            </a:r>
+            <a:r>
+              <a:rPr lang="en-US" dirty="0"/>
+              <a:t> that most influenced a prediction.</a:t>
+            </a:r>
+          </a:p>
+          <a:p>
+            <a:pPr lvl="1"/>
+            <a:endParaRPr lang="en-US" dirty="0"/>
+          </a:p>
+          <a:p>
+            <a:r>
+              <a:rPr lang="en-US" dirty="0"/>
+              <a:t>Concept-Based Explanations</a:t>
+            </a:r>
+          </a:p>
+        </p:txBody>
+      </p:sp>
+    </p:spTree>
+    <p:extLst>
+      <p:ext uri="{BB962C8B-B14F-4D97-AF65-F5344CB8AC3E}">
+        <p14:creationId xmlns:p14="http://schemas.microsoft.com/office/powerpoint/2010/main" val="462343618"/>
+      </p:ext>
+    </p:extLst>
+  </p:cSld>
+  <p:clrMapOvr>
+    <a:masterClrMapping/>
+  </p:clrMapOvr>
+</p:sld>
+</file>
+
+<file path=ppt/slides/slide33.xml><?xml version="1.0" encoding="utf-8"?>
+<p:sld xmlns:a="http://schemas.openxmlformats.org/drawingml/2006/main" xmlns:r="http://schemas.openxmlformats.org/officeDocument/2006/relationships" xmlns:p="http://schemas.openxmlformats.org/presentationml/2006/main">
+  <p:cSld>
+    <p:spTree>
+      <p:nvGrpSpPr>
+        <p:cNvPr id="1" name=""/>
+        <p:cNvGrpSpPr/>
+        <p:nvPr/>
+      </p:nvGrpSpPr>
+      <p:grpSpPr>
+        <a:xfrm>
+          <a:off x="0" y="0"/>
+          <a:ext cx="0" cy="0"/>
+          <a:chOff x="0" y="0"/>
+          <a:chExt cx="0" cy="0"/>
+        </a:xfrm>
+      </p:grpSpPr>
+      <p:sp>
+        <p:nvSpPr>
+          <p:cNvPr id="2" name="Title 1">
+            <a:extLst>
+              <a:ext uri="{FF2B5EF4-FFF2-40B4-BE49-F238E27FC236}">
+                <a16:creationId xmlns:a16="http://schemas.microsoft.com/office/drawing/2014/main" id="{9014A2BB-A997-4385-4A4C-A13DFE1A2117}"/>
+              </a:ext>
+            </a:extLst>
+          </p:cNvPr>
+          <p:cNvSpPr>
+            <a:spLocks noGrp="1"/>
+          </p:cNvSpPr>
+          <p:nvPr>
+            <p:ph type="title"/>
+          </p:nvPr>
+        </p:nvSpPr>
+        <p:spPr/>
+        <p:txBody>
+          <a:bodyPr/>
+          <a:lstStyle/>
+          <a:p>
+            <a:r>
+              <a:rPr lang="en-US" dirty="0"/>
+              <a:t>Explainability in Large Language Models</a:t>
+            </a:r>
+          </a:p>
+        </p:txBody>
+      </p:sp>
+      <p:sp>
+        <p:nvSpPr>
+          <p:cNvPr id="3" name="Text Placeholder 2">
+            <a:extLst>
+              <a:ext uri="{FF2B5EF4-FFF2-40B4-BE49-F238E27FC236}">
+                <a16:creationId xmlns:a16="http://schemas.microsoft.com/office/drawing/2014/main" id="{6BE2D825-5981-A2BB-AA42-5CF7D6EC980A}"/>
+              </a:ext>
+            </a:extLst>
+          </p:cNvPr>
+          <p:cNvSpPr>
+            <a:spLocks noGrp="1"/>
+          </p:cNvSpPr>
+          <p:nvPr>
+            <p:ph type="body" idx="1"/>
+          </p:nvPr>
+        </p:nvSpPr>
+        <p:spPr>
+          <a:xfrm>
+            <a:off x="415600" y="1151400"/>
+            <a:ext cx="11360700" cy="4555200"/>
+          </a:xfrm>
+        </p:spPr>
+        <p:txBody>
+          <a:bodyPr/>
+          <a:lstStyle/>
+          <a:p>
+            <a:r>
+              <a:rPr lang="en-US" b="1" dirty="0"/>
+              <a:t>Proxy interpretability</a:t>
+            </a:r>
+            <a:r>
+              <a:rPr lang="en-US" dirty="0"/>
+              <a:t> via attention, probing, and mechanistic inspection.</a:t>
+            </a:r>
+          </a:p>
+          <a:p>
+            <a:endParaRPr lang="en-US" dirty="0"/>
+          </a:p>
+          <a:p>
+            <a:r>
+              <a:rPr lang="en-US" b="1" dirty="0"/>
+              <a:t>Attention-Based Explanations</a:t>
+            </a:r>
+          </a:p>
+          <a:p>
+            <a:pPr lvl="1"/>
+            <a:r>
+              <a:rPr lang="en-US" dirty="0"/>
+              <a:t>Examine attention weights to see which input tokens influence output.</a:t>
+            </a:r>
+          </a:p>
+          <a:p>
+            <a:pPr lvl="1"/>
+            <a:endParaRPr lang="en-US" dirty="0"/>
+          </a:p>
+          <a:p>
+            <a:r>
+              <a:rPr lang="en-US" dirty="0"/>
+              <a:t>Probing and Representation Analysis</a:t>
+            </a:r>
+          </a:p>
+          <a:p>
+            <a:pPr lvl="1"/>
+            <a:r>
+              <a:rPr lang="en-US" dirty="0"/>
+              <a:t>Identify what information is encoded in intermediate representations. Train simple probe classifiers on frozen embeddings (e.g., POS, gender, factuality).</a:t>
+            </a:r>
+          </a:p>
+          <a:p>
+            <a:r>
+              <a:rPr lang="en-US" dirty="0"/>
+              <a:t>Mechanistic Interpretability</a:t>
+            </a:r>
+          </a:p>
+          <a:p>
+            <a:pPr lvl="1"/>
+            <a:r>
+              <a:rPr lang="en-US" dirty="0"/>
+              <a:t>Reverse-engineer neurons, circuits, and attention heads. Study individual components’ behavior to reveal structure or causal role.</a:t>
+            </a:r>
+          </a:p>
+          <a:p>
+            <a:endParaRPr lang="en-US" dirty="0"/>
+          </a:p>
+        </p:txBody>
+      </p:sp>
+    </p:spTree>
+    <p:extLst>
+      <p:ext uri="{BB962C8B-B14F-4D97-AF65-F5344CB8AC3E}">
+        <p14:creationId xmlns:p14="http://schemas.microsoft.com/office/powerpoint/2010/main" val="3425700413"/>
+      </p:ext>
+    </p:extLst>
+  </p:cSld>
+  <p:clrMapOvr>
+    <a:masterClrMapping/>
+  </p:clrMapOvr>
+</p:sld>
+</file>
+
+<file path=ppt/slides/slide34.xml><?xml version="1.0" encoding="utf-8"?>
 <p:sld xmlns:a="http://schemas.openxmlformats.org/drawingml/2006/main" xmlns:r="http://schemas.openxmlformats.org/officeDocument/2006/relationships" xmlns:p="http://schemas.openxmlformats.org/presentationml/2006/main">
   <p:cSld>
     <p:spTree>
@@ -22140,220 +23482,6 @@
         <p14:creationId xmlns:p14="http://schemas.microsoft.com/office/powerpoint/2010/main" val="2906668534"/>
       </p:ext>
     </p:extLst>
-  </p:cSld>
-  <p:clrMapOvr>
-    <a:masterClrMapping/>
-  </p:clrMapOvr>
-</p:sld>
-</file>
-
-<file path=ppt/slides/slide3.xml><?xml version="1.0" encoding="utf-8"?>
-<p:sld xmlns:a="http://schemas.openxmlformats.org/drawingml/2006/main" xmlns:r="http://schemas.openxmlformats.org/officeDocument/2006/relationships" xmlns:p="http://schemas.openxmlformats.org/presentationml/2006/main">
-  <p:cSld>
-    <p:spTree>
-      <p:nvGrpSpPr>
-        <p:cNvPr id="1" name="Shape 59"/>
-        <p:cNvGrpSpPr/>
-        <p:nvPr/>
-      </p:nvGrpSpPr>
-      <p:grpSpPr>
-        <a:xfrm>
-          <a:off x="0" y="0"/>
-          <a:ext cx="0" cy="0"/>
-          <a:chOff x="0" y="0"/>
-          <a:chExt cx="0" cy="0"/>
-        </a:xfrm>
-      </p:grpSpPr>
-      <p:sp>
-        <p:nvSpPr>
-          <p:cNvPr id="60" name="Google Shape;60;p24"/>
-          <p:cNvSpPr txBox="1">
-            <a:spLocks noGrp="1"/>
-          </p:cNvSpPr>
-          <p:nvPr>
-            <p:ph type="title"/>
-          </p:nvPr>
-        </p:nvSpPr>
-        <p:spPr>
-          <a:xfrm>
-            <a:off x="415600" y="86563"/>
-            <a:ext cx="11360700" cy="763500"/>
-          </a:xfrm>
-          <a:prstGeom prst="rect">
-            <a:avLst/>
-          </a:prstGeom>
-          <a:noFill/>
-          <a:ln>
-            <a:noFill/>
-          </a:ln>
-        </p:spPr>
-        <p:txBody>
-          <a:bodyPr spcFirstLastPara="1" wrap="square" lIns="121900" tIns="121900" rIns="121900" bIns="121900" anchor="t" anchorCtr="0">
-            <a:noAutofit/>
-          </a:bodyPr>
-          <a:lstStyle/>
-          <a:p>
-            <a:pPr marL="0" lvl="0" indent="0" algn="l" rtl="0">
-              <a:lnSpc>
-                <a:spcPct val="100000"/>
-              </a:lnSpc>
-              <a:spcBef>
-                <a:spcPts val="0"/>
-              </a:spcBef>
-              <a:spcAft>
-                <a:spcPts val="0"/>
-              </a:spcAft>
-              <a:buClr>
-                <a:srgbClr val="FFFFFF"/>
-              </a:buClr>
-              <a:buSzPts val="3700"/>
-              <a:buNone/>
-            </a:pPr>
-            <a:r>
-              <a:rPr lang="en-US"/>
-              <a:t>What we’ll cover today</a:t>
-            </a:r>
-            <a:endParaRPr/>
-          </a:p>
-        </p:txBody>
-      </p:sp>
-      <p:sp>
-        <p:nvSpPr>
-          <p:cNvPr id="61" name="Google Shape;61;p24"/>
-          <p:cNvSpPr txBox="1">
-            <a:spLocks noGrp="1"/>
-          </p:cNvSpPr>
-          <p:nvPr>
-            <p:ph type="body" idx="1"/>
-          </p:nvPr>
-        </p:nvSpPr>
-        <p:spPr>
-          <a:xfrm>
-            <a:off x="415600" y="1536633"/>
-            <a:ext cx="11360700" cy="4555200"/>
-          </a:xfrm>
-          <a:prstGeom prst="rect">
-            <a:avLst/>
-          </a:prstGeom>
-          <a:noFill/>
-          <a:ln>
-            <a:noFill/>
-          </a:ln>
-        </p:spPr>
-        <p:txBody>
-          <a:bodyPr spcFirstLastPara="1" wrap="square" lIns="121900" tIns="121900" rIns="121900" bIns="121900" anchor="t" anchorCtr="0">
-            <a:normAutofit/>
-          </a:bodyPr>
-          <a:lstStyle/>
-          <a:p>
-            <a:pPr marL="457200" lvl="0" indent="-381000" algn="l" rtl="0">
-              <a:lnSpc>
-                <a:spcPct val="115000"/>
-              </a:lnSpc>
-              <a:spcBef>
-                <a:spcPts val="0"/>
-              </a:spcBef>
-              <a:spcAft>
-                <a:spcPts val="0"/>
-              </a:spcAft>
-              <a:buClr>
-                <a:srgbClr val="434343"/>
-              </a:buClr>
-              <a:buSzPts val="2400"/>
-              <a:buChar char="●"/>
-            </a:pPr>
-            <a:r>
-              <a:rPr lang="en-US" dirty="0"/>
-              <a:t>Why we want ML models to be interpretable?</a:t>
-            </a:r>
-          </a:p>
-          <a:p>
-            <a:pPr marL="457200" lvl="0" indent="-381000" algn="l" rtl="0">
-              <a:lnSpc>
-                <a:spcPct val="115000"/>
-              </a:lnSpc>
-              <a:spcBef>
-                <a:spcPts val="0"/>
-              </a:spcBef>
-              <a:spcAft>
-                <a:spcPts val="0"/>
-              </a:spcAft>
-              <a:buClr>
-                <a:srgbClr val="434343"/>
-              </a:buClr>
-              <a:buSzPts val="2400"/>
-              <a:buChar char="●"/>
-            </a:pPr>
-            <a:endParaRPr lang="en-US" dirty="0"/>
-          </a:p>
-          <a:p>
-            <a:pPr marL="457200" lvl="0" indent="-381000" algn="l" rtl="0">
-              <a:lnSpc>
-                <a:spcPct val="115000"/>
-              </a:lnSpc>
-              <a:spcBef>
-                <a:spcPts val="0"/>
-              </a:spcBef>
-              <a:spcAft>
-                <a:spcPts val="0"/>
-              </a:spcAft>
-              <a:buClr>
-                <a:srgbClr val="434343"/>
-              </a:buClr>
-              <a:buSzPts val="2400"/>
-              <a:buChar char="●"/>
-            </a:pPr>
-            <a:r>
-              <a:rPr lang="en-US" dirty="0"/>
-              <a:t>Real-world use cases</a:t>
-            </a:r>
-            <a:endParaRPr dirty="0"/>
-          </a:p>
-          <a:p>
-            <a:pPr marL="457200" lvl="0" indent="-228600" algn="l" rtl="0">
-              <a:lnSpc>
-                <a:spcPct val="115000"/>
-              </a:lnSpc>
-              <a:spcBef>
-                <a:spcPts val="0"/>
-              </a:spcBef>
-              <a:spcAft>
-                <a:spcPts val="0"/>
-              </a:spcAft>
-              <a:buClr>
-                <a:srgbClr val="434343"/>
-              </a:buClr>
-              <a:buSzPts val="2400"/>
-              <a:buNone/>
-            </a:pPr>
-            <a:endParaRPr dirty="0"/>
-          </a:p>
-          <a:p>
-            <a:pPr marL="457200" lvl="0" indent="-381000" algn="l" rtl="0">
-              <a:lnSpc>
-                <a:spcPct val="115000"/>
-              </a:lnSpc>
-              <a:spcBef>
-                <a:spcPts val="0"/>
-              </a:spcBef>
-              <a:spcAft>
-                <a:spcPts val="0"/>
-              </a:spcAft>
-              <a:buClr>
-                <a:srgbClr val="434343"/>
-              </a:buClr>
-              <a:buSzPts val="2400"/>
-              <a:buChar char="●"/>
-            </a:pPr>
-            <a:r>
-              <a:rPr lang="en-US" dirty="0"/>
-              <a:t>Types of Interpretability</a:t>
-            </a:r>
-            <a:endParaRPr dirty="0"/>
-          </a:p>
-        </p:txBody>
-      </p:sp>
-    </p:spTree>
   </p:cSld>
   <p:clrMapOvr>
     <a:masterClrMapping/>
@@ -23178,7 +24306,7 @@
             </a:pPr>
             <a:r>
               <a:rPr lang="en-US" dirty="0"/>
-              <a:t>Legal Recourse </a:t>
+              <a:t>Legal or Contractual Recourse </a:t>
             </a:r>
             <a:endParaRPr dirty="0"/>
           </a:p>

--- a/Lectures/Lecture13-InterpretabilityOverview.pptx
+++ b/Lectures/Lecture13-InterpretabilityOverview.pptx
@@ -18,25 +18,25 @@
     <p:sldId id="526" r:id="rId9"/>
     <p:sldId id="262" r:id="rId10"/>
     <p:sldId id="263" r:id="rId11"/>
-    <p:sldId id="528" r:id="rId12"/>
-    <p:sldId id="531" r:id="rId13"/>
-    <p:sldId id="529" r:id="rId14"/>
-    <p:sldId id="264" r:id="rId15"/>
-    <p:sldId id="266" r:id="rId16"/>
-    <p:sldId id="500" r:id="rId17"/>
-    <p:sldId id="499" r:id="rId18"/>
-    <p:sldId id="513" r:id="rId19"/>
-    <p:sldId id="516" r:id="rId20"/>
-    <p:sldId id="517" r:id="rId21"/>
-    <p:sldId id="518" r:id="rId22"/>
-    <p:sldId id="519" r:id="rId23"/>
-    <p:sldId id="520" r:id="rId24"/>
-    <p:sldId id="279" r:id="rId25"/>
-    <p:sldId id="522" r:id="rId26"/>
-    <p:sldId id="280" r:id="rId27"/>
-    <p:sldId id="523" r:id="rId28"/>
-    <p:sldId id="281" r:id="rId29"/>
-    <p:sldId id="524" r:id="rId30"/>
+    <p:sldId id="535" r:id="rId12"/>
+    <p:sldId id="264" r:id="rId13"/>
+    <p:sldId id="266" r:id="rId14"/>
+    <p:sldId id="499" r:id="rId15"/>
+    <p:sldId id="513" r:id="rId16"/>
+    <p:sldId id="516" r:id="rId17"/>
+    <p:sldId id="517" r:id="rId18"/>
+    <p:sldId id="518" r:id="rId19"/>
+    <p:sldId id="519" r:id="rId20"/>
+    <p:sldId id="520" r:id="rId21"/>
+    <p:sldId id="279" r:id="rId22"/>
+    <p:sldId id="522" r:id="rId23"/>
+    <p:sldId id="280" r:id="rId24"/>
+    <p:sldId id="523" r:id="rId25"/>
+    <p:sldId id="281" r:id="rId26"/>
+    <p:sldId id="524" r:id="rId27"/>
+    <p:sldId id="528" r:id="rId28"/>
+    <p:sldId id="531" r:id="rId29"/>
+    <p:sldId id="529" r:id="rId30"/>
     <p:sldId id="525" r:id="rId31"/>
     <p:sldId id="532" r:id="rId32"/>
     <p:sldId id="533" r:id="rId33"/>
@@ -6977,115 +6977,6 @@
   <p:cSld>
     <p:spTree>
       <p:nvGrpSpPr>
-        <p:cNvPr id="1" name="Shape 85"/>
-        <p:cNvGrpSpPr/>
-        <p:nvPr/>
-      </p:nvGrpSpPr>
-      <p:grpSpPr>
-        <a:xfrm>
-          <a:off x="0" y="0"/>
-          <a:ext cx="0" cy="0"/>
-          <a:chOff x="0" y="0"/>
-          <a:chExt cx="0" cy="0"/>
-        </a:xfrm>
-      </p:grpSpPr>
-      <p:sp>
-        <p:nvSpPr>
-          <p:cNvPr id="86" name="Google Shape;86;p27:notes"/>
-          <p:cNvSpPr txBox="1">
-            <a:spLocks noGrp="1"/>
-          </p:cNvSpPr>
-          <p:nvPr>
-            <p:ph type="body" idx="1"/>
-          </p:nvPr>
-        </p:nvSpPr>
-        <p:spPr>
-          <a:xfrm>
-            <a:off x="685800" y="4400550"/>
-            <a:ext cx="5486400" cy="3600450"/>
-          </a:xfrm>
-          <a:prstGeom prst="rect">
-            <a:avLst/>
-          </a:prstGeom>
-        </p:spPr>
-        <p:txBody>
-          <a:bodyPr spcFirstLastPara="1" wrap="square" lIns="91425" tIns="45700" rIns="91425" bIns="45700" anchor="t" anchorCtr="0">
-            <a:noAutofit/>
-          </a:bodyPr>
-          <a:lstStyle/>
-          <a:p>
-            <a:pPr marL="0" lvl="0" indent="0" algn="l" rtl="0">
-              <a:spcBef>
-                <a:spcPts val="0"/>
-              </a:spcBef>
-              <a:spcAft>
-                <a:spcPts val="0"/>
-              </a:spcAft>
-              <a:buNone/>
-            </a:pPr>
-            <a:endParaRPr/>
-          </a:p>
-        </p:txBody>
-      </p:sp>
-      <p:sp>
-        <p:nvSpPr>
-          <p:cNvPr id="87" name="Google Shape;87;p27:notes"/>
-          <p:cNvSpPr>
-            <a:spLocks noGrp="1" noRot="1" noChangeAspect="1"/>
-          </p:cNvSpPr>
-          <p:nvPr>
-            <p:ph type="sldImg" idx="2"/>
-          </p:nvPr>
-        </p:nvSpPr>
-        <p:spPr>
-          <a:xfrm>
-            <a:off x="685800" y="1143000"/>
-            <a:ext cx="5486400" cy="3086100"/>
-          </a:xfrm>
-          <a:custGeom>
-            <a:avLst/>
-            <a:gdLst/>
-            <a:ahLst/>
-            <a:cxnLst/>
-            <a:rect l="l" t="t" r="r" b="b"/>
-            <a:pathLst>
-              <a:path w="120000" h="120000" extrusionOk="0">
-                <a:moveTo>
-                  <a:pt x="0" y="0"/>
-                </a:moveTo>
-                <a:lnTo>
-                  <a:pt x="120000" y="0"/>
-                </a:lnTo>
-                <a:lnTo>
-                  <a:pt x="120000" y="120000"/>
-                </a:lnTo>
-                <a:lnTo>
-                  <a:pt x="0" y="120000"/>
-                </a:lnTo>
-                <a:close/>
-              </a:path>
-            </a:pathLst>
-          </a:custGeom>
-        </p:spPr>
-      </p:sp>
-    </p:spTree>
-    <p:extLst>
-      <p:ext uri="{BB962C8B-B14F-4D97-AF65-F5344CB8AC3E}">
-        <p14:creationId xmlns:p14="http://schemas.microsoft.com/office/powerpoint/2010/main" val="2801267188"/>
-      </p:ext>
-    </p:extLst>
-  </p:cSld>
-  <p:clrMapOvr>
-    <a:masterClrMapping/>
-  </p:clrMapOvr>
-</p:notes>
-</file>
-
-<file path=ppt/notesSlides/notesSlide12.xml><?xml version="1.0" encoding="utf-8"?>
-<p:notes xmlns:a="http://schemas.openxmlformats.org/drawingml/2006/main" xmlns:r="http://schemas.openxmlformats.org/officeDocument/2006/relationships" xmlns:p="http://schemas.openxmlformats.org/presentationml/2006/main" showMasterSp="0" showMasterPhAnim="0">
-  <p:cSld>
-    <p:spTree>
-      <p:nvGrpSpPr>
         <p:cNvPr id="1" name="Shape 97"/>
         <p:cNvGrpSpPr/>
         <p:nvPr/>
@@ -7190,7 +7081,7 @@
 </p:notes>
 </file>
 
-<file path=ppt/notesSlides/notesSlide13.xml><?xml version="1.0" encoding="utf-8"?>
+<file path=ppt/notesSlides/notesSlide12.xml><?xml version="1.0" encoding="utf-8"?>
 <p:notes xmlns:a="http://schemas.openxmlformats.org/drawingml/2006/main" xmlns:r="http://schemas.openxmlformats.org/officeDocument/2006/relationships" xmlns:p="http://schemas.openxmlformats.org/presentationml/2006/main" showMasterSp="0" showMasterPhAnim="0">
   <p:cSld>
     <p:spTree>
@@ -7299,7 +7190,7 @@
 </p:notes>
 </file>
 
-<file path=ppt/notesSlides/notesSlide14.xml><?xml version="1.0" encoding="utf-8"?>
+<file path=ppt/notesSlides/notesSlide13.xml><?xml version="1.0" encoding="utf-8"?>
 <p:notes xmlns:a="http://schemas.openxmlformats.org/drawingml/2006/main" xmlns:r="http://schemas.openxmlformats.org/officeDocument/2006/relationships" xmlns:p="http://schemas.openxmlformats.org/presentationml/2006/main" showMasterSp="0" showMasterPhAnim="0">
   <p:cSld>
     <p:spTree>
@@ -7408,7 +7299,7 @@
 </p:notes>
 </file>
 
-<file path=ppt/notesSlides/notesSlide15.xml><?xml version="1.0" encoding="utf-8"?>
+<file path=ppt/notesSlides/notesSlide14.xml><?xml version="1.0" encoding="utf-8"?>
 <p:notes xmlns:a="http://schemas.openxmlformats.org/drawingml/2006/main" xmlns:r="http://schemas.openxmlformats.org/officeDocument/2006/relationships" xmlns:p="http://schemas.openxmlformats.org/presentationml/2006/main" showMasterSp="0" showMasterPhAnim="0">
   <p:cSld>
     <p:spTree>
@@ -7517,7 +7408,7 @@
 </p:notes>
 </file>
 
-<file path=ppt/notesSlides/notesSlide16.xml><?xml version="1.0" encoding="utf-8"?>
+<file path=ppt/notesSlides/notesSlide15.xml><?xml version="1.0" encoding="utf-8"?>
 <p:notes xmlns:a="http://schemas.openxmlformats.org/drawingml/2006/main" xmlns:r="http://schemas.openxmlformats.org/officeDocument/2006/relationships" xmlns:p="http://schemas.openxmlformats.org/presentationml/2006/main" showMasterSp="0" showMasterPhAnim="0">
   <p:cSld>
     <p:spTree>
@@ -7626,7 +7517,7 @@
 </p:notes>
 </file>
 
-<file path=ppt/notesSlides/notesSlide17.xml><?xml version="1.0" encoding="utf-8"?>
+<file path=ppt/notesSlides/notesSlide16.xml><?xml version="1.0" encoding="utf-8"?>
 <p:notes xmlns:a="http://schemas.openxmlformats.org/drawingml/2006/main" xmlns:r="http://schemas.openxmlformats.org/officeDocument/2006/relationships" xmlns:p="http://schemas.openxmlformats.org/presentationml/2006/main" showMasterSp="0" showMasterPhAnim="0">
   <p:cSld>
     <p:spTree>
@@ -7735,7 +7626,7 @@
 </p:notes>
 </file>
 
-<file path=ppt/notesSlides/notesSlide18.xml><?xml version="1.0" encoding="utf-8"?>
+<file path=ppt/notesSlides/notesSlide17.xml><?xml version="1.0" encoding="utf-8"?>
 <p:notes xmlns:a="http://schemas.openxmlformats.org/drawingml/2006/main" xmlns:r="http://schemas.openxmlformats.org/officeDocument/2006/relationships" xmlns:p="http://schemas.openxmlformats.org/presentationml/2006/main" showMasterSp="0" showMasterPhAnim="0">
   <p:cSld>
     <p:spTree>
@@ -7857,7 +7748,7 @@
 </p:notes>
 </file>
 
-<file path=ppt/notesSlides/notesSlide19.xml><?xml version="1.0" encoding="utf-8"?>
+<file path=ppt/notesSlides/notesSlide18.xml><?xml version="1.0" encoding="utf-8"?>
 <p:notes xmlns:a="http://schemas.openxmlformats.org/drawingml/2006/main" xmlns:r="http://schemas.openxmlformats.org/officeDocument/2006/relationships" xmlns:p="http://schemas.openxmlformats.org/presentationml/2006/main" showMasterSp="0" showMasterPhAnim="0">
   <p:cSld>
     <p:spTree>
@@ -7984,111 +7875,7 @@
 </p:notes>
 </file>
 
-<file path=ppt/notesSlides/notesSlide2.xml><?xml version="1.0" encoding="utf-8"?>
-<p:notes xmlns:a="http://schemas.openxmlformats.org/drawingml/2006/main" xmlns:r="http://schemas.openxmlformats.org/officeDocument/2006/relationships" xmlns:p="http://schemas.openxmlformats.org/presentationml/2006/main" showMasterSp="0" showMasterPhAnim="0">
-  <p:cSld>
-    <p:spTree>
-      <p:nvGrpSpPr>
-        <p:cNvPr id="1" name="Shape 56"/>
-        <p:cNvGrpSpPr/>
-        <p:nvPr/>
-      </p:nvGrpSpPr>
-      <p:grpSpPr>
-        <a:xfrm>
-          <a:off x="0" y="0"/>
-          <a:ext cx="0" cy="0"/>
-          <a:chOff x="0" y="0"/>
-          <a:chExt cx="0" cy="0"/>
-        </a:xfrm>
-      </p:grpSpPr>
-      <p:sp>
-        <p:nvSpPr>
-          <p:cNvPr id="57" name="Google Shape;57;p24:notes"/>
-          <p:cNvSpPr txBox="1">
-            <a:spLocks noGrp="1"/>
-          </p:cNvSpPr>
-          <p:nvPr>
-            <p:ph type="body" idx="1"/>
-          </p:nvPr>
-        </p:nvSpPr>
-        <p:spPr>
-          <a:xfrm>
-            <a:off x="685800" y="4400550"/>
-            <a:ext cx="5486400" cy="3600450"/>
-          </a:xfrm>
-          <a:prstGeom prst="rect">
-            <a:avLst/>
-          </a:prstGeom>
-        </p:spPr>
-        <p:txBody>
-          <a:bodyPr spcFirstLastPara="1" wrap="square" lIns="91425" tIns="45700" rIns="91425" bIns="45700" anchor="t" anchorCtr="0">
-            <a:noAutofit/>
-          </a:bodyPr>
-          <a:lstStyle/>
-          <a:p>
-            <a:pPr marL="0" lvl="0" indent="0" algn="l" rtl="0">
-              <a:spcBef>
-                <a:spcPts val="0"/>
-              </a:spcBef>
-              <a:spcAft>
-                <a:spcPts val="0"/>
-              </a:spcAft>
-              <a:buNone/>
-            </a:pPr>
-            <a:endParaRPr/>
-          </a:p>
-        </p:txBody>
-      </p:sp>
-      <p:sp>
-        <p:nvSpPr>
-          <p:cNvPr id="58" name="Google Shape;58;p24:notes"/>
-          <p:cNvSpPr>
-            <a:spLocks noGrp="1" noRot="1" noChangeAspect="1"/>
-          </p:cNvSpPr>
-          <p:nvPr>
-            <p:ph type="sldImg" idx="2"/>
-          </p:nvPr>
-        </p:nvSpPr>
-        <p:spPr>
-          <a:xfrm>
-            <a:off x="685800" y="1143000"/>
-            <a:ext cx="5486400" cy="3086100"/>
-          </a:xfrm>
-          <a:custGeom>
-            <a:avLst/>
-            <a:gdLst/>
-            <a:ahLst/>
-            <a:cxnLst/>
-            <a:rect l="l" t="t" r="r" b="b"/>
-            <a:pathLst>
-              <a:path w="120000" h="120000" extrusionOk="0">
-                <a:moveTo>
-                  <a:pt x="0" y="0"/>
-                </a:moveTo>
-                <a:lnTo>
-                  <a:pt x="120000" y="0"/>
-                </a:lnTo>
-                <a:lnTo>
-                  <a:pt x="120000" y="120000"/>
-                </a:lnTo>
-                <a:lnTo>
-                  <a:pt x="0" y="120000"/>
-                </a:lnTo>
-                <a:close/>
-              </a:path>
-            </a:pathLst>
-          </a:custGeom>
-        </p:spPr>
-      </p:sp>
-    </p:spTree>
-  </p:cSld>
-  <p:clrMapOvr>
-    <a:masterClrMapping/>
-  </p:clrMapOvr>
-</p:notes>
-</file>
-
-<file path=ppt/notesSlides/notesSlide20.xml><?xml version="1.0" encoding="utf-8"?>
+<file path=ppt/notesSlides/notesSlide19.xml><?xml version="1.0" encoding="utf-8"?>
 <p:notes xmlns:a="http://schemas.openxmlformats.org/drawingml/2006/main" xmlns:r="http://schemas.openxmlformats.org/officeDocument/2006/relationships" xmlns:p="http://schemas.openxmlformats.org/presentationml/2006/main" showMasterSp="0" showMasterPhAnim="0">
   <p:cSld>
     <p:spTree>
@@ -8210,7 +7997,111 @@
 </p:notes>
 </file>
 
-<file path=ppt/notesSlides/notesSlide21.xml><?xml version="1.0" encoding="utf-8"?>
+<file path=ppt/notesSlides/notesSlide2.xml><?xml version="1.0" encoding="utf-8"?>
+<p:notes xmlns:a="http://schemas.openxmlformats.org/drawingml/2006/main" xmlns:r="http://schemas.openxmlformats.org/officeDocument/2006/relationships" xmlns:p="http://schemas.openxmlformats.org/presentationml/2006/main" showMasterSp="0" showMasterPhAnim="0">
+  <p:cSld>
+    <p:spTree>
+      <p:nvGrpSpPr>
+        <p:cNvPr id="1" name="Shape 56"/>
+        <p:cNvGrpSpPr/>
+        <p:nvPr/>
+      </p:nvGrpSpPr>
+      <p:grpSpPr>
+        <a:xfrm>
+          <a:off x="0" y="0"/>
+          <a:ext cx="0" cy="0"/>
+          <a:chOff x="0" y="0"/>
+          <a:chExt cx="0" cy="0"/>
+        </a:xfrm>
+      </p:grpSpPr>
+      <p:sp>
+        <p:nvSpPr>
+          <p:cNvPr id="57" name="Google Shape;57;p24:notes"/>
+          <p:cNvSpPr txBox="1">
+            <a:spLocks noGrp="1"/>
+          </p:cNvSpPr>
+          <p:nvPr>
+            <p:ph type="body" idx="1"/>
+          </p:nvPr>
+        </p:nvSpPr>
+        <p:spPr>
+          <a:xfrm>
+            <a:off x="685800" y="4400550"/>
+            <a:ext cx="5486400" cy="3600450"/>
+          </a:xfrm>
+          <a:prstGeom prst="rect">
+            <a:avLst/>
+          </a:prstGeom>
+        </p:spPr>
+        <p:txBody>
+          <a:bodyPr spcFirstLastPara="1" wrap="square" lIns="91425" tIns="45700" rIns="91425" bIns="45700" anchor="t" anchorCtr="0">
+            <a:noAutofit/>
+          </a:bodyPr>
+          <a:lstStyle/>
+          <a:p>
+            <a:pPr marL="0" lvl="0" indent="0" algn="l" rtl="0">
+              <a:spcBef>
+                <a:spcPts val="0"/>
+              </a:spcBef>
+              <a:spcAft>
+                <a:spcPts val="0"/>
+              </a:spcAft>
+              <a:buNone/>
+            </a:pPr>
+            <a:endParaRPr/>
+          </a:p>
+        </p:txBody>
+      </p:sp>
+      <p:sp>
+        <p:nvSpPr>
+          <p:cNvPr id="58" name="Google Shape;58;p24:notes"/>
+          <p:cNvSpPr>
+            <a:spLocks noGrp="1" noRot="1" noChangeAspect="1"/>
+          </p:cNvSpPr>
+          <p:nvPr>
+            <p:ph type="sldImg" idx="2"/>
+          </p:nvPr>
+        </p:nvSpPr>
+        <p:spPr>
+          <a:xfrm>
+            <a:off x="685800" y="1143000"/>
+            <a:ext cx="5486400" cy="3086100"/>
+          </a:xfrm>
+          <a:custGeom>
+            <a:avLst/>
+            <a:gdLst/>
+            <a:ahLst/>
+            <a:cxnLst/>
+            <a:rect l="l" t="t" r="r" b="b"/>
+            <a:pathLst>
+              <a:path w="120000" h="120000" extrusionOk="0">
+                <a:moveTo>
+                  <a:pt x="0" y="0"/>
+                </a:moveTo>
+                <a:lnTo>
+                  <a:pt x="120000" y="0"/>
+                </a:lnTo>
+                <a:lnTo>
+                  <a:pt x="120000" y="120000"/>
+                </a:lnTo>
+                <a:lnTo>
+                  <a:pt x="0" y="120000"/>
+                </a:lnTo>
+                <a:close/>
+              </a:path>
+            </a:pathLst>
+          </a:custGeom>
+        </p:spPr>
+      </p:sp>
+    </p:spTree>
+  </p:cSld>
+  <p:clrMapOvr>
+    <a:masterClrMapping/>
+  </p:clrMapOvr>
+</p:notes>
+</file>
+
+<file path=ppt/notesSlides/notesSlide20.xml><?xml version="1.0" encoding="utf-8"?>
 <p:notes xmlns:a="http://schemas.openxmlformats.org/drawingml/2006/main" xmlns:r="http://schemas.openxmlformats.org/officeDocument/2006/relationships" xmlns:p="http://schemas.openxmlformats.org/presentationml/2006/main" showMasterSp="0" showMasterPhAnim="0">
   <p:cSld>
     <p:spTree>
@@ -8337,7 +8228,7 @@
 </p:notes>
 </file>
 
-<file path=ppt/notesSlides/notesSlide22.xml><?xml version="1.0" encoding="utf-8"?>
+<file path=ppt/notesSlides/notesSlide21.xml><?xml version="1.0" encoding="utf-8"?>
 <p:notes xmlns:a="http://schemas.openxmlformats.org/drawingml/2006/main" xmlns:r="http://schemas.openxmlformats.org/officeDocument/2006/relationships" xmlns:p="http://schemas.openxmlformats.org/presentationml/2006/main" showMasterSp="0" showMasterPhAnim="0">
   <p:cSld>
     <p:spTree>
@@ -8459,7 +8350,7 @@
 </p:notes>
 </file>
 
-<file path=ppt/notesSlides/notesSlide23.xml><?xml version="1.0" encoding="utf-8"?>
+<file path=ppt/notesSlides/notesSlide22.xml><?xml version="1.0" encoding="utf-8"?>
 <p:notes xmlns:a="http://schemas.openxmlformats.org/drawingml/2006/main" xmlns:r="http://schemas.openxmlformats.org/officeDocument/2006/relationships" xmlns:p="http://schemas.openxmlformats.org/presentationml/2006/main" showMasterSp="0" showMasterPhAnim="0">
   <p:cSld>
     <p:spTree>
@@ -8568,7 +8459,7 @@
 </p:notes>
 </file>
 
-<file path=ppt/notesSlides/notesSlide24.xml><?xml version="1.0" encoding="utf-8"?>
+<file path=ppt/notesSlides/notesSlide23.xml><?xml version="1.0" encoding="utf-8"?>
 <p:notes xmlns:a="http://schemas.openxmlformats.org/drawingml/2006/main" xmlns:r="http://schemas.openxmlformats.org/officeDocument/2006/relationships" xmlns:p="http://schemas.openxmlformats.org/presentationml/2006/main" showMasterSp="0" showMasterPhAnim="0">
   <p:cSld>
     <p:spTree>
@@ -15238,8 +15129,16 @@
 </file>
 
 <file path=ppt/slides/slide11.xml><?xml version="1.0" encoding="utf-8"?>
-<p:sld xmlns:a="http://schemas.openxmlformats.org/drawingml/2006/main" xmlns:r="http://schemas.openxmlformats.org/officeDocument/2006/relationships" xmlns:p="http://schemas.openxmlformats.org/presentationml/2006/main">
+<p:sld xmlns:a="http://schemas.openxmlformats.org/drawingml/2006/main" xmlns:r="http://schemas.openxmlformats.org/officeDocument/2006/relationships" xmlns:p="http://schemas.openxmlformats.org/presentationml/2006/main" showMasterSp="0">
   <p:cSld>
+    <p:bg>
+      <p:bgPr>
+        <a:solidFill>
+          <a:srgbClr val="FFFFFF"/>
+        </a:solidFill>
+        <a:effectLst/>
+      </p:bgPr>
+    </p:bg>
     <p:spTree>
       <p:nvGrpSpPr>
         <p:cNvPr id="1" name=""/>
@@ -15256,360 +15155,505 @@
       </p:grpSpPr>
       <p:sp>
         <p:nvSpPr>
-          <p:cNvPr id="2" name="Title 1">
+          <p:cNvPr id="2" name="Rectangle 1">
             <a:extLst>
               <a:ext uri="{FF2B5EF4-FFF2-40B4-BE49-F238E27FC236}">
-                <a16:creationId xmlns:a16="http://schemas.microsoft.com/office/drawing/2014/main" id="{50487EF6-8B03-B0F4-F062-95ECED381053}"/>
+                <a16:creationId xmlns:a16="http://schemas.microsoft.com/office/drawing/2014/main" id="{68C185E5-4100-4564-FC92-04060EDDBE6A}"/>
               </a:ext>
             </a:extLst>
           </p:cNvPr>
-          <p:cNvSpPr>
-            <a:spLocks noGrp="1"/>
-          </p:cNvSpPr>
+          <p:cNvSpPr/>
           <p:nvPr>
-            <p:ph type="title"/>
+            <p:custDataLst>
+              <p:tags r:id="rId2"/>
+            </p:custDataLst>
           </p:nvPr>
         </p:nvSpPr>
-        <p:spPr/>
+        <p:spPr>
+          <a:xfrm>
+            <a:off x="444693" y="1742703"/>
+            <a:ext cx="2371696" cy="2371696"/>
+          </a:xfrm>
+          <a:prstGeom prst="rect">
+            <a:avLst/>
+          </a:prstGeom>
+          <a:blipFill>
+            <a:blip r:embed="rId5">
+              <a:extLst>
+                <a:ext uri="{96DAC541-7B7A-43D3-8B79-37D633B846F1}">
+                  <asvg:svgBlip xmlns:asvg="http://schemas.microsoft.com/office/drawing/2016/SVG/main" r:embed="rId6"/>
+                </a:ext>
+              </a:extLst>
+            </a:blip>
+            <a:stretch>
+              <a:fillRect/>
+            </a:stretch>
+          </a:blipFill>
+          <a:ln>
+            <a:solidFill>
+              <a:srgbClr val="FFFFFF"/>
+            </a:solidFill>
+          </a:ln>
+        </p:spPr>
+        <p:style>
+          <a:lnRef idx="2">
+            <a:schemeClr val="accent1">
+              <a:shade val="15000"/>
+            </a:schemeClr>
+          </a:lnRef>
+          <a:fillRef idx="1">
+            <a:schemeClr val="accent1"/>
+          </a:fillRef>
+          <a:effectRef idx="0">
+            <a:schemeClr val="accent1"/>
+          </a:effectRef>
+          <a:fontRef idx="minor">
+            <a:schemeClr val="lt1"/>
+          </a:fontRef>
+        </p:style>
         <p:txBody>
-          <a:bodyPr/>
+          <a:bodyPr rtlCol="0" anchor="ctr"/>
+          <a:lstStyle/>
+          <a:p>
+            <a:pPr algn="ctr"/>
+            <a:endParaRPr lang="en-US"/>
+          </a:p>
+        </p:txBody>
+      </p:sp>
+      <p:sp>
+        <p:nvSpPr>
+          <p:cNvPr id="3" name="Rectangle 2">
+            <a:extLst>
+              <a:ext uri="{FF2B5EF4-FFF2-40B4-BE49-F238E27FC236}">
+                <a16:creationId xmlns:a16="http://schemas.microsoft.com/office/drawing/2014/main" id="{A52764C2-DF5F-AB77-B98D-B5545D19DDF2}"/>
+              </a:ext>
+            </a:extLst>
+          </p:cNvPr>
+          <p:cNvSpPr/>
+          <p:nvPr>
+            <p:custDataLst>
+              <p:tags r:id="rId3"/>
+            </p:custDataLst>
+          </p:nvPr>
+        </p:nvSpPr>
+        <p:spPr>
+          <a:xfrm>
+            <a:off x="3112851" y="1000897"/>
+            <a:ext cx="8486226" cy="3855308"/>
+          </a:xfrm>
+          <a:prstGeom prst="rect">
+            <a:avLst/>
+          </a:prstGeom>
+          <a:noFill/>
+          <a:ln w="25400" cap="flat" cmpd="sng" algn="ctr">
+            <a:solidFill>
+              <a:srgbClr val="FFFFFF"/>
+            </a:solidFill>
+            <a:prstDash val="solid"/>
+          </a:ln>
+          <a:effectLst/>
+          <a:extLst>
+            <a:ext uri="{909E8E84-426E-40DD-AFC4-6F175D3DCCD1}">
+              <a14:hiddenFill xmlns:a14="http://schemas.microsoft.com/office/drawing/2010/main">
+                <a:solidFill>
+                  <a:schemeClr val="accent1"/>
+                </a:solidFill>
+              </a14:hiddenFill>
+            </a:ext>
+          </a:extLst>
+        </p:spPr>
+        <p:style>
+          <a:lnRef idx="2">
+            <a:schemeClr val="accent1">
+              <a:shade val="15000"/>
+            </a:schemeClr>
+          </a:lnRef>
+          <a:fillRef idx="1">
+            <a:schemeClr val="accent1"/>
+          </a:fillRef>
+          <a:effectRef idx="0">
+            <a:schemeClr val="accent1"/>
+          </a:effectRef>
+          <a:fontRef idx="minor">
+            <a:schemeClr val="lt1"/>
+          </a:fontRef>
+        </p:style>
+        <p:txBody>
+          <a:bodyPr rtlCol="0" anchor="ctr"/>
           <a:lstStyle/>
           <a:p>
             <a:r>
-              <a:rPr lang="en-US" dirty="0"/>
-              <a:t>Types of </a:t>
-            </a:r>
-            <a:r>
-              <a:rPr lang="en-US" dirty="0" err="1"/>
-              <a:t>Interpretablity</a:t>
-            </a:r>
-            <a:r>
-              <a:rPr lang="en-US" dirty="0"/>
-              <a:t> Methods</a:t>
+              <a:rPr lang="en-US" sz="4000" b="1">
+                <a:solidFill>
+                  <a:srgbClr val="000000"/>
+                </a:solidFill>
+              </a:rPr>
+              <a:t>What properties do we want from an explanation?</a:t>
             </a:r>
           </a:p>
         </p:txBody>
       </p:sp>
       <p:sp>
         <p:nvSpPr>
-          <p:cNvPr id="3" name="Text Placeholder 2">
+          <p:cNvPr id="4" name="Rectangle 3">
             <a:extLst>
               <a:ext uri="{FF2B5EF4-FFF2-40B4-BE49-F238E27FC236}">
-                <a16:creationId xmlns:a16="http://schemas.microsoft.com/office/drawing/2014/main" id="{83A79153-E496-ACBE-14A6-64DB9C6D5FBC}"/>
+                <a16:creationId xmlns:a16="http://schemas.microsoft.com/office/drawing/2014/main" id="{ED2DB226-3D73-FF18-1A0A-278810ABD579}"/>
               </a:ext>
             </a:extLst>
           </p:cNvPr>
-          <p:cNvSpPr>
-            <a:spLocks noGrp="1"/>
-          </p:cNvSpPr>
-          <p:nvPr>
-            <p:ph type="body" idx="1"/>
-          </p:nvPr>
+          <p:cNvSpPr/>
+          <p:nvPr/>
         </p:nvSpPr>
-        <p:spPr/>
+        <p:spPr>
+          <a:xfrm>
+            <a:off x="0" y="5820032"/>
+            <a:ext cx="12192001" cy="1037968"/>
+          </a:xfrm>
+          <a:prstGeom prst="rect">
+            <a:avLst/>
+          </a:prstGeom>
+          <a:solidFill>
+            <a:srgbClr val="198038"/>
+          </a:solidFill>
+          <a:ln w="25400" cap="flat" cmpd="sng" algn="ctr">
+            <a:noFill/>
+            <a:prstDash val="solid"/>
+          </a:ln>
+          <a:effectLst/>
+          <a:extLst>
+            <a:ext uri="{91240B29-F687-4F45-9708-019B960494DF}">
+              <a14:hiddenLine xmlns:a14="http://schemas.microsoft.com/office/drawing/2010/main" w="25400" cap="flat" cmpd="sng" algn="ctr">
+                <a:solidFill>
+                  <a:schemeClr val="accent1">
+                    <a:shade val="15000"/>
+                  </a:schemeClr>
+                </a:solidFill>
+                <a:prstDash val="solid"/>
+              </a14:hiddenLine>
+            </a:ext>
+          </a:extLst>
+        </p:spPr>
+        <p:style>
+          <a:lnRef idx="2">
+            <a:schemeClr val="accent1">
+              <a:shade val="15000"/>
+            </a:schemeClr>
+          </a:lnRef>
+          <a:fillRef idx="1">
+            <a:schemeClr val="accent1"/>
+          </a:fillRef>
+          <a:effectRef idx="0">
+            <a:schemeClr val="accent1"/>
+          </a:effectRef>
+          <a:fontRef idx="minor">
+            <a:schemeClr val="lt1"/>
+          </a:fontRef>
+        </p:style>
         <p:txBody>
-          <a:bodyPr/>
+          <a:bodyPr lIns="741155" tIns="259492" rIns="1852888" bIns="203886" rtlCol="0" anchor="ctr">
+            <a:normAutofit fontScale="85000" lnSpcReduction="10000"/>
+          </a:bodyPr>
           <a:lstStyle/>
           <a:p>
             <a:r>
-              <a:rPr lang="en-US" dirty="0"/>
-              <a:t>Global vs Local</a:t>
+              <a:rPr lang="en-US" sz="2600">
+                <a:solidFill>
+                  <a:srgbClr val="FFFFFF"/>
+                </a:solidFill>
+              </a:rPr>
+              <a:t>The </a:t>
             </a:r>
-          </a:p>
-          <a:p>
             <a:r>
-              <a:rPr lang="en-US" dirty="0"/>
-              <a:t>Inherently Interpretable models vs Post-hoc model agnostic</a:t>
+              <a:rPr lang="en-US" sz="2600">
+                <a:solidFill>
+                  <a:srgbClr val="FFFFFF"/>
+                </a:solidFill>
+                <a:hlinkClick r:id="rId7">
+                  <a:extLst>
+                    <a:ext uri="{A12FA001-AC4F-418D-AE19-62706E023703}">
+                      <ahyp:hlinkClr xmlns:ahyp="http://schemas.microsoft.com/office/drawing/2018/hyperlinkcolor" val="tx"/>
+                    </a:ext>
+                  </a:extLst>
+                </a:hlinkClick>
+              </a:rPr>
+              <a:t>Slido app</a:t>
+            </a:r>
+            <a:r>
+              <a:rPr lang="en-US" sz="2600">
+                <a:solidFill>
+                  <a:srgbClr val="FFFFFF"/>
+                </a:solidFill>
+              </a:rPr>
+              <a:t> must be installed on every computer you’re presenting from</a:t>
             </a:r>
           </a:p>
         </p:txBody>
       </p:sp>
+      <p:pic>
+        <p:nvPicPr>
+          <p:cNvPr id="6" name="Graphic 5">
+            <a:extLst>
+              <a:ext uri="{FF2B5EF4-FFF2-40B4-BE49-F238E27FC236}">
+                <a16:creationId xmlns:a16="http://schemas.microsoft.com/office/drawing/2014/main" id="{F133CA08-DCDC-6F3C-0BF5-6E68BCB700C0}"/>
+              </a:ext>
+            </a:extLst>
+          </p:cNvPr>
+          <p:cNvPicPr>
+            <a:picLocks/>
+          </p:cNvPicPr>
+          <p:nvPr/>
+        </p:nvPicPr>
+        <p:blipFill>
+          <a:blip r:embed="rId8">
+            <a:extLst>
+              <a:ext uri="{96DAC541-7B7A-43D3-8B79-37D633B846F1}">
+                <asvg:svgBlip xmlns:asvg="http://schemas.microsoft.com/office/drawing/2016/SVG/main" r:embed="rId9"/>
+              </a:ext>
+            </a:extLst>
+          </a:blip>
+          <a:stretch>
+            <a:fillRect/>
+          </a:stretch>
+        </p:blipFill>
+        <p:spPr>
+          <a:xfrm>
+            <a:off x="296462" y="6190785"/>
+            <a:ext cx="296462" cy="296462"/>
+          </a:xfrm>
+          <a:prstGeom prst="rect">
+            <a:avLst/>
+          </a:prstGeom>
+        </p:spPr>
+      </p:pic>
+      <p:sp>
+        <p:nvSpPr>
+          <p:cNvPr id="7" name="Trapezoid 6">
+            <a:extLst>
+              <a:ext uri="{FF2B5EF4-FFF2-40B4-BE49-F238E27FC236}">
+                <a16:creationId xmlns:a16="http://schemas.microsoft.com/office/drawing/2014/main" id="{08F144D0-00E8-6E07-C42E-8AF5A4217083}"/>
+              </a:ext>
+            </a:extLst>
+          </p:cNvPr>
+          <p:cNvSpPr/>
+          <p:nvPr/>
+        </p:nvSpPr>
+        <p:spPr>
+          <a:xfrm rot="2700000">
+            <a:off x="9620371" y="514924"/>
+            <a:ext cx="3335198" cy="778213"/>
+          </a:xfrm>
+          <a:prstGeom prst="trapezoid">
+            <a:avLst>
+              <a:gd name="adj" fmla="val 100000"/>
+            </a:avLst>
+          </a:prstGeom>
+          <a:solidFill>
+            <a:srgbClr val="EDFAF2"/>
+          </a:solidFill>
+          <a:ln w="25400" cap="flat" cmpd="sng" algn="ctr">
+            <a:noFill/>
+            <a:prstDash val="solid"/>
+          </a:ln>
+          <a:effectLst/>
+          <a:extLst>
+            <a:ext uri="{91240B29-F687-4F45-9708-019B960494DF}">
+              <a14:hiddenLine xmlns:a14="http://schemas.microsoft.com/office/drawing/2010/main" w="25400" cap="flat" cmpd="sng" algn="ctr">
+                <a:solidFill>
+                  <a:schemeClr val="accent1">
+                    <a:shade val="15000"/>
+                  </a:schemeClr>
+                </a:solidFill>
+                <a:prstDash val="solid"/>
+              </a14:hiddenLine>
+            </a:ext>
+          </a:extLst>
+        </p:spPr>
+        <p:style>
+          <a:lnRef idx="2">
+            <a:schemeClr val="accent1">
+              <a:shade val="15000"/>
+            </a:schemeClr>
+          </a:lnRef>
+          <a:fillRef idx="1">
+            <a:schemeClr val="accent1"/>
+          </a:fillRef>
+          <a:effectRef idx="0">
+            <a:schemeClr val="accent1"/>
+          </a:effectRef>
+          <a:fontRef idx="minor">
+            <a:schemeClr val="lt1"/>
+          </a:fontRef>
+        </p:style>
+        <p:txBody>
+          <a:bodyPr tIns="0" bIns="0" rtlCol="0" anchor="t">
+            <a:normAutofit fontScale="70000" lnSpcReduction="20000"/>
+          </a:bodyPr>
+          <a:lstStyle/>
+          <a:p>
+            <a:pPr algn="ctr"/>
+            <a:r>
+              <a:rPr lang="en-US" sz="2600" b="1">
+                <a:solidFill>
+                  <a:srgbClr val="198038"/>
+                </a:solidFill>
+              </a:rPr>
+              <a:t>Do not edit
+</a:t>
+            </a:r>
+            <a:r>
+              <a:rPr lang="en-US" sz="2200">
+                <a:solidFill>
+                  <a:srgbClr val="198038"/>
+                </a:solidFill>
+                <a:hlinkClick r:id="rId10">
+                  <a:extLst>
+                    <a:ext uri="{A12FA001-AC4F-418D-AE19-62706E023703}">
+                      <ahyp:hlinkClr xmlns:ahyp="http://schemas.microsoft.com/office/drawing/2018/hyperlinkcolor" val="tx"/>
+                    </a:ext>
+                  </a:extLst>
+                </a:hlinkClick>
+              </a:rPr>
+              <a:t>How to change the design</a:t>
+            </a:r>
+            <a:endParaRPr lang="en-US" sz="2200">
+              <a:solidFill>
+                <a:srgbClr val="198038"/>
+              </a:solidFill>
+            </a:endParaRPr>
+          </a:p>
+        </p:txBody>
+      </p:sp>
+      <p:pic>
+        <p:nvPicPr>
+          <p:cNvPr id="9" name="Graphic 8">
+            <a:extLst>
+              <a:ext uri="{FF2B5EF4-FFF2-40B4-BE49-F238E27FC236}">
+                <a16:creationId xmlns:a16="http://schemas.microsoft.com/office/drawing/2014/main" id="{96E3CE3E-FB26-51F9-1113-52E9B52D6E2B}"/>
+              </a:ext>
+            </a:extLst>
+          </p:cNvPr>
+          <p:cNvPicPr>
+            <a:picLocks/>
+          </p:cNvPicPr>
+          <p:nvPr/>
+        </p:nvPicPr>
+        <p:blipFill>
+          <a:blip r:embed="rId11">
+            <a:extLst>
+              <a:ext uri="{96DAC541-7B7A-43D3-8B79-37D633B846F1}">
+                <asvg:svgBlip xmlns:asvg="http://schemas.microsoft.com/office/drawing/2016/SVG/main" r:embed="rId12"/>
+              </a:ext>
+            </a:extLst>
+          </a:blip>
+          <a:stretch>
+            <a:fillRect/>
+          </a:stretch>
+        </p:blipFill>
+        <p:spPr>
+          <a:xfrm>
+            <a:off x="10746748" y="6153727"/>
+            <a:ext cx="1111733" cy="370578"/>
+          </a:xfrm>
+          <a:prstGeom prst="rect">
+            <a:avLst/>
+          </a:prstGeom>
+        </p:spPr>
+      </p:pic>
     </p:spTree>
+    <p:custDataLst>
+      <p:tags r:id="rId1"/>
+    </p:custDataLst>
     <p:extLst>
       <p:ext uri="{BB962C8B-B14F-4D97-AF65-F5344CB8AC3E}">
-        <p14:creationId xmlns:p14="http://schemas.microsoft.com/office/powerpoint/2010/main" val="2413394886"/>
+        <p14:creationId xmlns:p14="http://schemas.microsoft.com/office/powerpoint/2010/main" val="227548739"/>
       </p:ext>
     </p:extLst>
   </p:cSld>
   <p:clrMapOvr>
     <a:masterClrMapping/>
   </p:clrMapOvr>
+  <p:timing>
+    <p:tnLst>
+      <p:par>
+        <p:cTn id="1" dur="indefinite" restart="never" nodeType="tmRoot">
+          <p:childTnLst>
+            <p:seq concurrent="1" nextAc="seek">
+              <p:cTn id="2" dur="indefinite" nodeType="mainSeq">
+                <p:childTnLst>
+                  <p:par>
+                    <p:cTn id="3" fill="hold">
+                      <p:stCondLst>
+                        <p:cond delay="indefinite"/>
+                      </p:stCondLst>
+                      <p:childTnLst>
+                        <p:par>
+                          <p:cTn id="4" fill="hold">
+                            <p:stCondLst>
+                              <p:cond delay="0"/>
+                            </p:stCondLst>
+                            <p:childTnLst>
+                              <p:par>
+                                <p:cTn id="5" presetID="26" presetClass="emph" presetSubtype="0" fill="hold" grpId="0" nodeType="clickEffect">
+                                  <p:stCondLst>
+                                    <p:cond delay="0"/>
+                                  </p:stCondLst>
+                                  <p:childTnLst>
+                                    <p:animEffect transition="out" filter="fade">
+                                      <p:cBhvr>
+                                        <p:cTn id="6" dur="50" tmFilter="0, 0; .2, .5; .8, .5; 1, 0"/>
+                                        <p:tgtEl>
+                                          <p:spTgt spid="3"/>
+                                        </p:tgtEl>
+                                      </p:cBhvr>
+                                    </p:animEffect>
+                                    <p:animScale>
+                                      <p:cBhvr>
+                                        <p:cTn id="7" dur="25" autoRev="1" fill="hold"/>
+                                        <p:tgtEl>
+                                          <p:spTgt spid="3"/>
+                                        </p:tgtEl>
+                                      </p:cBhvr>
+                                      <p:by x="105000" y="105000"/>
+                                    </p:animScale>
+                                  </p:childTnLst>
+                                </p:cTn>
+                              </p:par>
+                            </p:childTnLst>
+                          </p:cTn>
+                        </p:par>
+                      </p:childTnLst>
+                    </p:cTn>
+                  </p:par>
+                </p:childTnLst>
+              </p:cTn>
+              <p:prevCondLst>
+                <p:cond evt="onPrev" delay="0">
+                  <p:tgtEl>
+                    <p:sldTgt/>
+                  </p:tgtEl>
+                </p:cond>
+              </p:prevCondLst>
+              <p:nextCondLst>
+                <p:cond evt="onNext" delay="0">
+                  <p:tgtEl>
+                    <p:sldTgt/>
+                  </p:tgtEl>
+                </p:cond>
+              </p:nextCondLst>
+            </p:seq>
+          </p:childTnLst>
+        </p:cTn>
+      </p:par>
+    </p:tnLst>
+    <p:bldLst>
+      <p:bldP spid="3" grpId="0" animBg="1"/>
+    </p:bldLst>
+  </p:timing>
 </p:sld>
 </file>
 
 <file path=ppt/slides/slide12.xml><?xml version="1.0" encoding="utf-8"?>
-<p:sld xmlns:a="http://schemas.openxmlformats.org/drawingml/2006/main" xmlns:r="http://schemas.openxmlformats.org/officeDocument/2006/relationships" xmlns:p="http://schemas.openxmlformats.org/presentationml/2006/main">
-  <p:cSld>
-    <p:spTree>
-      <p:nvGrpSpPr>
-        <p:cNvPr id="1" name="">
-          <a:extLst>
-            <a:ext uri="{FF2B5EF4-FFF2-40B4-BE49-F238E27FC236}">
-              <a16:creationId xmlns:a16="http://schemas.microsoft.com/office/drawing/2014/main" id="{ECCC77D8-A61C-B890-1B4F-C13428B1BF28}"/>
-            </a:ext>
-          </a:extLst>
-        </p:cNvPr>
-        <p:cNvGrpSpPr/>
-        <p:nvPr/>
-      </p:nvGrpSpPr>
-      <p:grpSpPr>
-        <a:xfrm>
-          <a:off x="0" y="0"/>
-          <a:ext cx="0" cy="0"/>
-          <a:chOff x="0" y="0"/>
-          <a:chExt cx="0" cy="0"/>
-        </a:xfrm>
-      </p:grpSpPr>
-      <p:sp>
-        <p:nvSpPr>
-          <p:cNvPr id="2" name="Title 1">
-            <a:extLst>
-              <a:ext uri="{FF2B5EF4-FFF2-40B4-BE49-F238E27FC236}">
-                <a16:creationId xmlns:a16="http://schemas.microsoft.com/office/drawing/2014/main" id="{0281F420-D67D-3749-7796-D473050B303C}"/>
-              </a:ext>
-            </a:extLst>
-          </p:cNvPr>
-          <p:cNvSpPr>
-            <a:spLocks noGrp="1"/>
-          </p:cNvSpPr>
-          <p:nvPr>
-            <p:ph type="title"/>
-          </p:nvPr>
-        </p:nvSpPr>
-        <p:spPr/>
-        <p:txBody>
-          <a:bodyPr/>
-          <a:lstStyle/>
-          <a:p>
-            <a:r>
-              <a:rPr lang="en-US" dirty="0"/>
-              <a:t>Global vs. Local</a:t>
-            </a:r>
-          </a:p>
-        </p:txBody>
-      </p:sp>
-      <p:sp>
-        <p:nvSpPr>
-          <p:cNvPr id="3" name="Text Placeholder 2">
-            <a:extLst>
-              <a:ext uri="{FF2B5EF4-FFF2-40B4-BE49-F238E27FC236}">
-                <a16:creationId xmlns:a16="http://schemas.microsoft.com/office/drawing/2014/main" id="{98F1DCF5-80BC-22B8-58C0-F939AE753D5F}"/>
-              </a:ext>
-            </a:extLst>
-          </p:cNvPr>
-          <p:cNvSpPr>
-            <a:spLocks noGrp="1"/>
-          </p:cNvSpPr>
-          <p:nvPr>
-            <p:ph type="body" idx="1"/>
-          </p:nvPr>
-        </p:nvSpPr>
-        <p:spPr/>
-        <p:txBody>
-          <a:bodyPr/>
-          <a:lstStyle/>
-          <a:p>
-            <a:pPr marL="76200" indent="0">
-              <a:buNone/>
-            </a:pPr>
-            <a:endParaRPr lang="en-US" dirty="0"/>
-          </a:p>
-          <a:p>
-            <a:r>
-              <a:rPr lang="en-US" dirty="0"/>
-              <a:t>Global: how the entire model behaves on average.</a:t>
-            </a:r>
-          </a:p>
-          <a:p>
-            <a:pPr marL="76200" indent="0">
-              <a:buNone/>
-            </a:pPr>
-            <a:r>
-              <a:rPr lang="en-US" dirty="0"/>
-              <a:t>		e.g. feature importance, coefficients, partial-dependence plots.</a:t>
-            </a:r>
-          </a:p>
-          <a:p>
-            <a:endParaRPr lang="en-US" dirty="0"/>
-          </a:p>
-          <a:p>
-            <a:r>
-              <a:rPr lang="en-US" dirty="0"/>
-              <a:t>Local: why one prediction was made.</a:t>
-            </a:r>
-          </a:p>
-          <a:p>
-            <a:pPr lvl="1"/>
-            <a:r>
-              <a:rPr lang="en-US" dirty="0"/>
-              <a:t>e.g. SHAP or LIME explanation for a single case.</a:t>
-            </a:r>
-          </a:p>
-          <a:p>
-            <a:endParaRPr lang="en-US" dirty="0"/>
-          </a:p>
-          <a:p>
-            <a:endParaRPr lang="en-US" dirty="0"/>
-          </a:p>
-          <a:p>
-            <a:endParaRPr lang="en-US" dirty="0"/>
-          </a:p>
-          <a:p>
-            <a:endParaRPr lang="en-US" dirty="0"/>
-          </a:p>
-          <a:p>
-            <a:endParaRPr lang="en-US" dirty="0"/>
-          </a:p>
-          <a:p>
-            <a:endParaRPr lang="en-US" dirty="0"/>
-          </a:p>
-        </p:txBody>
-      </p:sp>
-    </p:spTree>
-    <p:extLst>
-      <p:ext uri="{BB962C8B-B14F-4D97-AF65-F5344CB8AC3E}">
-        <p14:creationId xmlns:p14="http://schemas.microsoft.com/office/powerpoint/2010/main" val="1019319694"/>
-      </p:ext>
-    </p:extLst>
-  </p:cSld>
-  <p:clrMapOvr>
-    <a:masterClrMapping/>
-  </p:clrMapOvr>
-</p:sld>
-</file>
-
-<file path=ppt/slides/slide13.xml><?xml version="1.0" encoding="utf-8"?>
-<p:sld xmlns:a="http://schemas.openxmlformats.org/drawingml/2006/main" xmlns:r="http://schemas.openxmlformats.org/officeDocument/2006/relationships" xmlns:p="http://schemas.openxmlformats.org/presentationml/2006/main">
-  <p:cSld>
-    <p:spTree>
-      <p:nvGrpSpPr>
-        <p:cNvPr id="1" name=""/>
-        <p:cNvGrpSpPr/>
-        <p:nvPr/>
-      </p:nvGrpSpPr>
-      <p:grpSpPr>
-        <a:xfrm>
-          <a:off x="0" y="0"/>
-          <a:ext cx="0" cy="0"/>
-          <a:chOff x="0" y="0"/>
-          <a:chExt cx="0" cy="0"/>
-        </a:xfrm>
-      </p:grpSpPr>
-      <p:sp>
-        <p:nvSpPr>
-          <p:cNvPr id="2" name="Title 1">
-            <a:extLst>
-              <a:ext uri="{FF2B5EF4-FFF2-40B4-BE49-F238E27FC236}">
-                <a16:creationId xmlns:a16="http://schemas.microsoft.com/office/drawing/2014/main" id="{621BF58B-ED20-8B52-A6FE-0B1AA72FBBE2}"/>
-              </a:ext>
-            </a:extLst>
-          </p:cNvPr>
-          <p:cNvSpPr>
-            <a:spLocks noGrp="1"/>
-          </p:cNvSpPr>
-          <p:nvPr>
-            <p:ph type="title"/>
-          </p:nvPr>
-        </p:nvSpPr>
-        <p:spPr/>
-        <p:txBody>
-          <a:bodyPr/>
-          <a:lstStyle/>
-          <a:p>
-            <a:r>
-              <a:rPr lang="en-US" b="1" dirty="0"/>
-              <a:t>Intrinsic vs. Post-hoc</a:t>
-            </a:r>
-            <a:br>
-              <a:rPr lang="en-US" b="1" dirty="0"/>
-            </a:br>
-            <a:endParaRPr lang="en-US" dirty="0"/>
-          </a:p>
-        </p:txBody>
-      </p:sp>
-      <p:sp>
-        <p:nvSpPr>
-          <p:cNvPr id="3" name="Text Placeholder 2">
-            <a:extLst>
-              <a:ext uri="{FF2B5EF4-FFF2-40B4-BE49-F238E27FC236}">
-                <a16:creationId xmlns:a16="http://schemas.microsoft.com/office/drawing/2014/main" id="{91EA8144-03B2-777F-6E22-70E87D6C2898}"/>
-              </a:ext>
-            </a:extLst>
-          </p:cNvPr>
-          <p:cNvSpPr>
-            <a:spLocks noGrp="1"/>
-          </p:cNvSpPr>
-          <p:nvPr>
-            <p:ph type="body" idx="1"/>
-          </p:nvPr>
-        </p:nvSpPr>
-        <p:spPr/>
-        <p:txBody>
-          <a:bodyPr/>
-          <a:lstStyle/>
-          <a:p>
-            <a:r>
-              <a:rPr lang="en-US" b="1" dirty="0"/>
-              <a:t>Intrinsic</a:t>
-            </a:r>
-            <a:r>
-              <a:rPr lang="en-US" dirty="0"/>
-              <a:t> — Model itself is understandable (e.g., linear regression, decision trees, generalized additive models).</a:t>
-            </a:r>
-          </a:p>
-          <a:p>
-            <a:r>
-              <a:rPr lang="en-US" b="1" dirty="0"/>
-              <a:t>Post-hoc</a:t>
-            </a:r>
-            <a:r>
-              <a:rPr lang="en-US" dirty="0"/>
-              <a:t> — Use secondary methods to explain black boxes (e.g., SHAP, LIME, Grad-CAM).</a:t>
-            </a:r>
-          </a:p>
-          <a:p>
-            <a:endParaRPr lang="en-US" dirty="0"/>
-          </a:p>
-          <a:p>
-            <a:endParaRPr lang="en-US" dirty="0"/>
-          </a:p>
-          <a:p>
-            <a:pPr marL="76200" indent="0" algn="ctr">
-              <a:buNone/>
-            </a:pPr>
-            <a:r>
-              <a:rPr lang="en-US" sz="4000" dirty="0"/>
-              <a:t>Tradeoffs?</a:t>
-            </a:r>
-          </a:p>
-          <a:p>
-            <a:endParaRPr lang="en-US" dirty="0"/>
-          </a:p>
-          <a:p>
-            <a:endParaRPr lang="en-US" dirty="0"/>
-          </a:p>
-          <a:p>
-            <a:endParaRPr lang="en-US" dirty="0"/>
-          </a:p>
-          <a:p>
-            <a:endParaRPr lang="en-US" dirty="0"/>
-          </a:p>
-        </p:txBody>
-      </p:sp>
-    </p:spTree>
-    <p:extLst>
-      <p:ext uri="{BB962C8B-B14F-4D97-AF65-F5344CB8AC3E}">
-        <p14:creationId xmlns:p14="http://schemas.microsoft.com/office/powerpoint/2010/main" val="3607318627"/>
-      </p:ext>
-    </p:extLst>
-  </p:cSld>
-  <p:clrMapOvr>
-    <a:masterClrMapping/>
-  </p:clrMapOvr>
-</p:sld>
-</file>
-
-<file path=ppt/slides/slide14.xml><?xml version="1.0" encoding="utf-8"?>
 <p:sld xmlns:a="http://schemas.openxmlformats.org/drawingml/2006/main" xmlns:r="http://schemas.openxmlformats.org/officeDocument/2006/relationships" xmlns:p="http://schemas.openxmlformats.org/presentationml/2006/main">
   <p:cSld>
     <p:spTree>
@@ -15673,7 +15717,7 @@
             </a:pPr>
             <a:r>
               <a:rPr lang="en-US" sz="4320" dirty="0"/>
-              <a:t>What do we want from a global explanation?</a:t>
+              <a:t>What do we want from an explanation?</a:t>
             </a:r>
             <a:endParaRPr dirty="0"/>
           </a:p>
@@ -16051,7 +16095,7 @@
 </p:sld>
 </file>
 
-<file path=ppt/slides/slide15.xml><?xml version="1.0" encoding="utf-8"?>
+<file path=ppt/slides/slide13.xml><?xml version="1.0" encoding="utf-8"?>
 <p:sld xmlns:a="http://schemas.openxmlformats.org/drawingml/2006/main" xmlns:r="http://schemas.openxmlformats.org/officeDocument/2006/relationships" xmlns:p="http://schemas.openxmlformats.org/presentationml/2006/main" show="0">
   <p:cSld>
     <p:spTree>
@@ -16250,139 +16294,7 @@
 </p:sld>
 </file>
 
-<file path=ppt/slides/slide16.xml><?xml version="1.0" encoding="utf-8"?>
-<p:sld xmlns:a="http://schemas.openxmlformats.org/drawingml/2006/main" xmlns:r="http://schemas.openxmlformats.org/officeDocument/2006/relationships" xmlns:p="http://schemas.openxmlformats.org/presentationml/2006/main">
-  <p:cSld>
-    <p:spTree>
-      <p:nvGrpSpPr>
-        <p:cNvPr id="1" name="Shape 88"/>
-        <p:cNvGrpSpPr/>
-        <p:nvPr/>
-      </p:nvGrpSpPr>
-      <p:grpSpPr>
-        <a:xfrm>
-          <a:off x="0" y="0"/>
-          <a:ext cx="0" cy="0"/>
-          <a:chOff x="0" y="0"/>
-          <a:chExt cx="0" cy="0"/>
-        </a:xfrm>
-      </p:grpSpPr>
-      <p:sp>
-        <p:nvSpPr>
-          <p:cNvPr id="89" name="Google Shape;89;p27"/>
-          <p:cNvSpPr txBox="1">
-            <a:spLocks noGrp="1"/>
-          </p:cNvSpPr>
-          <p:nvPr>
-            <p:ph type="title"/>
-          </p:nvPr>
-        </p:nvSpPr>
-        <p:spPr>
-          <a:xfrm>
-            <a:off x="415600" y="86563"/>
-            <a:ext cx="11360700" cy="763500"/>
-          </a:xfrm>
-          <a:prstGeom prst="rect">
-            <a:avLst/>
-          </a:prstGeom>
-          <a:noFill/>
-          <a:ln>
-            <a:noFill/>
-          </a:ln>
-        </p:spPr>
-        <p:txBody>
-          <a:bodyPr spcFirstLastPara="1" wrap="square" lIns="121900" tIns="121900" rIns="121900" bIns="121900" anchor="t" anchorCtr="0">
-            <a:normAutofit fontScale="90000"/>
-          </a:bodyPr>
-          <a:lstStyle/>
-          <a:p>
-            <a:pPr marL="0" lvl="0" indent="0" algn="l" rtl="0">
-              <a:lnSpc>
-                <a:spcPct val="100000"/>
-              </a:lnSpc>
-              <a:spcBef>
-                <a:spcPts val="0"/>
-              </a:spcBef>
-              <a:spcAft>
-                <a:spcPts val="0"/>
-              </a:spcAft>
-              <a:buClr>
-                <a:srgbClr val="FFFFFF"/>
-              </a:buClr>
-              <a:buSzPts val="3700"/>
-              <a:buNone/>
-            </a:pPr>
-            <a:r>
-              <a:rPr lang="en-US" sz="4320" dirty="0"/>
-              <a:t>What do we want from a local explanation?</a:t>
-            </a:r>
-            <a:endParaRPr dirty="0"/>
-          </a:p>
-        </p:txBody>
-      </p:sp>
-      <p:sp>
-        <p:nvSpPr>
-          <p:cNvPr id="90" name="Google Shape;90;p27"/>
-          <p:cNvSpPr txBox="1">
-            <a:spLocks noGrp="1"/>
-          </p:cNvSpPr>
-          <p:nvPr>
-            <p:ph type="body" idx="1"/>
-          </p:nvPr>
-        </p:nvSpPr>
-        <p:spPr>
-          <a:xfrm>
-            <a:off x="415600" y="1536633"/>
-            <a:ext cx="11360700" cy="4555200"/>
-          </a:xfrm>
-          <a:prstGeom prst="rect">
-            <a:avLst/>
-          </a:prstGeom>
-          <a:noFill/>
-          <a:ln>
-            <a:noFill/>
-          </a:ln>
-        </p:spPr>
-        <p:txBody>
-          <a:bodyPr spcFirstLastPara="1" wrap="square" lIns="121900" tIns="121900" rIns="121900" bIns="121900" anchor="t" anchorCtr="0">
-            <a:noAutofit/>
-          </a:bodyPr>
-          <a:lstStyle/>
-          <a:p>
-            <a:pPr marL="457200" lvl="0" indent="-228600" algn="l" rtl="0">
-              <a:lnSpc>
-                <a:spcPct val="115000"/>
-              </a:lnSpc>
-              <a:spcBef>
-                <a:spcPts val="0"/>
-              </a:spcBef>
-              <a:spcAft>
-                <a:spcPts val="0"/>
-              </a:spcAft>
-              <a:buClr>
-                <a:srgbClr val="434343"/>
-              </a:buClr>
-              <a:buSzPts val="2400"/>
-              <a:buNone/>
-            </a:pPr>
-            <a:endParaRPr/>
-          </a:p>
-        </p:txBody>
-      </p:sp>
-    </p:spTree>
-    <p:extLst>
-      <p:ext uri="{BB962C8B-B14F-4D97-AF65-F5344CB8AC3E}">
-        <p14:creationId xmlns:p14="http://schemas.microsoft.com/office/powerpoint/2010/main" val="3707586176"/>
-      </p:ext>
-    </p:extLst>
-  </p:cSld>
-  <p:clrMapOvr>
-    <a:masterClrMapping/>
-  </p:clrMapOvr>
-</p:sld>
-</file>
-
-<file path=ppt/slides/slide17.xml><?xml version="1.0" encoding="utf-8"?>
+<file path=ppt/slides/slide14.xml><?xml version="1.0" encoding="utf-8"?>
 <p:sld xmlns:a="http://schemas.openxmlformats.org/drawingml/2006/main" xmlns:r="http://schemas.openxmlformats.org/officeDocument/2006/relationships" xmlns:p="http://schemas.openxmlformats.org/presentationml/2006/main">
   <p:cSld>
     <p:spTree>
@@ -16808,7 +16720,7 @@
 </p:sld>
 </file>
 
-<file path=ppt/slides/slide18.xml><?xml version="1.0" encoding="utf-8"?>
+<file path=ppt/slides/slide15.xml><?xml version="1.0" encoding="utf-8"?>
 <p:sld xmlns:a="http://schemas.openxmlformats.org/drawingml/2006/main" xmlns:r="http://schemas.openxmlformats.org/officeDocument/2006/relationships" xmlns:p="http://schemas.openxmlformats.org/presentationml/2006/main">
   <p:cSld>
     <p:spTree>
@@ -17326,7 +17238,7 @@
 </p:sld>
 </file>
 
-<file path=ppt/slides/slide19.xml><?xml version="1.0" encoding="utf-8"?>
+<file path=ppt/slides/slide16.xml><?xml version="1.0" encoding="utf-8"?>
 <p:sld xmlns:a="http://schemas.openxmlformats.org/drawingml/2006/main" xmlns:r="http://schemas.openxmlformats.org/officeDocument/2006/relationships" xmlns:p="http://schemas.openxmlformats.org/presentationml/2006/main">
   <p:cSld>
     <p:spTree>
@@ -17570,136 +17482,7 @@
 </p:sld>
 </file>
 
-<file path=ppt/slides/slide2.xml><?xml version="1.0" encoding="utf-8"?>
-<p:sld xmlns:a="http://schemas.openxmlformats.org/drawingml/2006/main" xmlns:r="http://schemas.openxmlformats.org/officeDocument/2006/relationships" xmlns:p="http://schemas.openxmlformats.org/presentationml/2006/main">
-  <p:cSld>
-    <p:spTree>
-      <p:nvGrpSpPr>
-        <p:cNvPr id="1" name=""/>
-        <p:cNvGrpSpPr/>
-        <p:nvPr/>
-      </p:nvGrpSpPr>
-      <p:grpSpPr>
-        <a:xfrm>
-          <a:off x="0" y="0"/>
-          <a:ext cx="0" cy="0"/>
-          <a:chOff x="0" y="0"/>
-          <a:chExt cx="0" cy="0"/>
-        </a:xfrm>
-      </p:grpSpPr>
-      <p:sp>
-        <p:nvSpPr>
-          <p:cNvPr id="2" name="Title 1">
-            <a:extLst>
-              <a:ext uri="{FF2B5EF4-FFF2-40B4-BE49-F238E27FC236}">
-                <a16:creationId xmlns:a16="http://schemas.microsoft.com/office/drawing/2014/main" id="{94CF2A94-A63F-6149-AA28-2E35B60E3D3E}"/>
-              </a:ext>
-            </a:extLst>
-          </p:cNvPr>
-          <p:cNvSpPr>
-            <a:spLocks noGrp="1"/>
-          </p:cNvSpPr>
-          <p:nvPr>
-            <p:ph type="title"/>
-          </p:nvPr>
-        </p:nvSpPr>
-        <p:spPr/>
-        <p:txBody>
-          <a:bodyPr/>
-          <a:lstStyle/>
-          <a:p>
-            <a:endParaRPr lang="en-US"/>
-          </a:p>
-        </p:txBody>
-      </p:sp>
-      <p:graphicFrame>
-        <p:nvGraphicFramePr>
-          <p:cNvPr id="3" name="Diagram 2">
-            <a:extLst>
-              <a:ext uri="{FF2B5EF4-FFF2-40B4-BE49-F238E27FC236}">
-                <a16:creationId xmlns:a16="http://schemas.microsoft.com/office/drawing/2014/main" id="{8E902576-68A9-6E48-B0FE-5B1889953DC8}"/>
-              </a:ext>
-            </a:extLst>
-          </p:cNvPr>
-          <p:cNvGraphicFramePr/>
-          <p:nvPr/>
-        </p:nvGraphicFramePr>
-        <p:xfrm>
-          <a:off x="180467" y="0"/>
-          <a:ext cx="11776400" cy="6858000"/>
-        </p:xfrm>
-        <a:graphic>
-          <a:graphicData uri="http://schemas.openxmlformats.org/drawingml/2006/diagram">
-            <dgm:relIds xmlns:dgm="http://schemas.openxmlformats.org/drawingml/2006/diagram" xmlns:r="http://schemas.openxmlformats.org/officeDocument/2006/relationships" r:dm="rId2" r:lo="rId3" r:qs="rId4" r:cs="rId5"/>
-          </a:graphicData>
-        </a:graphic>
-      </p:graphicFrame>
-      <p:sp>
-        <p:nvSpPr>
-          <p:cNvPr id="4" name="Rectangle 3">
-            <a:extLst>
-              <a:ext uri="{FF2B5EF4-FFF2-40B4-BE49-F238E27FC236}">
-                <a16:creationId xmlns:a16="http://schemas.microsoft.com/office/drawing/2014/main" id="{E2C99BF2-C81A-5246-89D3-E49BCDCAD699}"/>
-              </a:ext>
-            </a:extLst>
-          </p:cNvPr>
-          <p:cNvSpPr/>
-          <p:nvPr/>
-        </p:nvSpPr>
-        <p:spPr>
-          <a:xfrm>
-            <a:off x="6388892" y="2534144"/>
-            <a:ext cx="2534195" cy="1789611"/>
-          </a:xfrm>
-          <a:prstGeom prst="rect">
-            <a:avLst/>
-          </a:prstGeom>
-          <a:noFill/>
-          <a:ln w="76200">
-            <a:solidFill>
-              <a:srgbClr val="C00000"/>
-            </a:solidFill>
-          </a:ln>
-        </p:spPr>
-        <p:style>
-          <a:lnRef idx="2">
-            <a:schemeClr val="accent1">
-              <a:shade val="50000"/>
-            </a:schemeClr>
-          </a:lnRef>
-          <a:fillRef idx="1">
-            <a:schemeClr val="accent1"/>
-          </a:fillRef>
-          <a:effectRef idx="0">
-            <a:schemeClr val="accent1"/>
-          </a:effectRef>
-          <a:fontRef idx="minor">
-            <a:schemeClr val="lt1"/>
-          </a:fontRef>
-        </p:style>
-        <p:txBody>
-          <a:bodyPr rtlCol="0" anchor="ctr"/>
-          <a:lstStyle/>
-          <a:p>
-            <a:pPr algn="ctr"/>
-            <a:endParaRPr lang="en-US"/>
-          </a:p>
-        </p:txBody>
-      </p:sp>
-    </p:spTree>
-    <p:extLst>
-      <p:ext uri="{BB962C8B-B14F-4D97-AF65-F5344CB8AC3E}">
-        <p14:creationId xmlns:p14="http://schemas.microsoft.com/office/powerpoint/2010/main" val="1582547232"/>
-      </p:ext>
-    </p:extLst>
-  </p:cSld>
-  <p:clrMapOvr>
-    <a:masterClrMapping/>
-  </p:clrMapOvr>
-</p:sld>
-</file>
-
-<file path=ppt/slides/slide20.xml><?xml version="1.0" encoding="utf-8"?>
+<file path=ppt/slides/slide17.xml><?xml version="1.0" encoding="utf-8"?>
 <p:sld xmlns:a="http://schemas.openxmlformats.org/drawingml/2006/main" xmlns:r="http://schemas.openxmlformats.org/officeDocument/2006/relationships" xmlns:p="http://schemas.openxmlformats.org/presentationml/2006/main">
   <p:cSld>
     <p:spTree>
@@ -18032,7 +17815,7 @@
 </p:sld>
 </file>
 
-<file path=ppt/slides/slide21.xml><?xml version="1.0" encoding="utf-8"?>
+<file path=ppt/slides/slide18.xml><?xml version="1.0" encoding="utf-8"?>
 <p:sld xmlns:a="http://schemas.openxmlformats.org/drawingml/2006/main" xmlns:r="http://schemas.openxmlformats.org/officeDocument/2006/relationships" xmlns:p="http://schemas.openxmlformats.org/presentationml/2006/main">
   <p:cSld>
     <p:spTree>
@@ -18462,7 +18245,7 @@
 </p:sld>
 </file>
 
-<file path=ppt/slides/slide22.xml><?xml version="1.0" encoding="utf-8"?>
+<file path=ppt/slides/slide19.xml><?xml version="1.0" encoding="utf-8"?>
 <p:sld xmlns:a="http://schemas.openxmlformats.org/drawingml/2006/main" xmlns:r="http://schemas.openxmlformats.org/officeDocument/2006/relationships" xmlns:p="http://schemas.openxmlformats.org/presentationml/2006/main">
   <p:cSld>
     <p:spTree>
@@ -19708,7 +19491,136 @@
 </p:sld>
 </file>
 
-<file path=ppt/slides/slide23.xml><?xml version="1.0" encoding="utf-8"?>
+<file path=ppt/slides/slide2.xml><?xml version="1.0" encoding="utf-8"?>
+<p:sld xmlns:a="http://schemas.openxmlformats.org/drawingml/2006/main" xmlns:r="http://schemas.openxmlformats.org/officeDocument/2006/relationships" xmlns:p="http://schemas.openxmlformats.org/presentationml/2006/main">
+  <p:cSld>
+    <p:spTree>
+      <p:nvGrpSpPr>
+        <p:cNvPr id="1" name=""/>
+        <p:cNvGrpSpPr/>
+        <p:nvPr/>
+      </p:nvGrpSpPr>
+      <p:grpSpPr>
+        <a:xfrm>
+          <a:off x="0" y="0"/>
+          <a:ext cx="0" cy="0"/>
+          <a:chOff x="0" y="0"/>
+          <a:chExt cx="0" cy="0"/>
+        </a:xfrm>
+      </p:grpSpPr>
+      <p:sp>
+        <p:nvSpPr>
+          <p:cNvPr id="2" name="Title 1">
+            <a:extLst>
+              <a:ext uri="{FF2B5EF4-FFF2-40B4-BE49-F238E27FC236}">
+                <a16:creationId xmlns:a16="http://schemas.microsoft.com/office/drawing/2014/main" id="{94CF2A94-A63F-6149-AA28-2E35B60E3D3E}"/>
+              </a:ext>
+            </a:extLst>
+          </p:cNvPr>
+          <p:cNvSpPr>
+            <a:spLocks noGrp="1"/>
+          </p:cNvSpPr>
+          <p:nvPr>
+            <p:ph type="title"/>
+          </p:nvPr>
+        </p:nvSpPr>
+        <p:spPr/>
+        <p:txBody>
+          <a:bodyPr/>
+          <a:lstStyle/>
+          <a:p>
+            <a:endParaRPr lang="en-US"/>
+          </a:p>
+        </p:txBody>
+      </p:sp>
+      <p:graphicFrame>
+        <p:nvGraphicFramePr>
+          <p:cNvPr id="3" name="Diagram 2">
+            <a:extLst>
+              <a:ext uri="{FF2B5EF4-FFF2-40B4-BE49-F238E27FC236}">
+                <a16:creationId xmlns:a16="http://schemas.microsoft.com/office/drawing/2014/main" id="{8E902576-68A9-6E48-B0FE-5B1889953DC8}"/>
+              </a:ext>
+            </a:extLst>
+          </p:cNvPr>
+          <p:cNvGraphicFramePr/>
+          <p:nvPr/>
+        </p:nvGraphicFramePr>
+        <p:xfrm>
+          <a:off x="180467" y="0"/>
+          <a:ext cx="11776400" cy="6858000"/>
+        </p:xfrm>
+        <a:graphic>
+          <a:graphicData uri="http://schemas.openxmlformats.org/drawingml/2006/diagram">
+            <dgm:relIds xmlns:dgm="http://schemas.openxmlformats.org/drawingml/2006/diagram" xmlns:r="http://schemas.openxmlformats.org/officeDocument/2006/relationships" r:dm="rId2" r:lo="rId3" r:qs="rId4" r:cs="rId5"/>
+          </a:graphicData>
+        </a:graphic>
+      </p:graphicFrame>
+      <p:sp>
+        <p:nvSpPr>
+          <p:cNvPr id="4" name="Rectangle 3">
+            <a:extLst>
+              <a:ext uri="{FF2B5EF4-FFF2-40B4-BE49-F238E27FC236}">
+                <a16:creationId xmlns:a16="http://schemas.microsoft.com/office/drawing/2014/main" id="{E2C99BF2-C81A-5246-89D3-E49BCDCAD699}"/>
+              </a:ext>
+            </a:extLst>
+          </p:cNvPr>
+          <p:cNvSpPr/>
+          <p:nvPr/>
+        </p:nvSpPr>
+        <p:spPr>
+          <a:xfrm>
+            <a:off x="6388892" y="2534144"/>
+            <a:ext cx="2534195" cy="1789611"/>
+          </a:xfrm>
+          <a:prstGeom prst="rect">
+            <a:avLst/>
+          </a:prstGeom>
+          <a:noFill/>
+          <a:ln w="76200">
+            <a:solidFill>
+              <a:srgbClr val="C00000"/>
+            </a:solidFill>
+          </a:ln>
+        </p:spPr>
+        <p:style>
+          <a:lnRef idx="2">
+            <a:schemeClr val="accent1">
+              <a:shade val="50000"/>
+            </a:schemeClr>
+          </a:lnRef>
+          <a:fillRef idx="1">
+            <a:schemeClr val="accent1"/>
+          </a:fillRef>
+          <a:effectRef idx="0">
+            <a:schemeClr val="accent1"/>
+          </a:effectRef>
+          <a:fontRef idx="minor">
+            <a:schemeClr val="lt1"/>
+          </a:fontRef>
+        </p:style>
+        <p:txBody>
+          <a:bodyPr rtlCol="0" anchor="ctr"/>
+          <a:lstStyle/>
+          <a:p>
+            <a:pPr algn="ctr"/>
+            <a:endParaRPr lang="en-US"/>
+          </a:p>
+        </p:txBody>
+      </p:sp>
+    </p:spTree>
+    <p:extLst>
+      <p:ext uri="{BB962C8B-B14F-4D97-AF65-F5344CB8AC3E}">
+        <p14:creationId xmlns:p14="http://schemas.microsoft.com/office/powerpoint/2010/main" val="1582547232"/>
+      </p:ext>
+    </p:extLst>
+  </p:cSld>
+  <p:clrMapOvr>
+    <a:masterClrMapping/>
+  </p:clrMapOvr>
+</p:sld>
+</file>
+
+<file path=ppt/slides/slide20.xml><?xml version="1.0" encoding="utf-8"?>
 <p:sld xmlns:a="http://schemas.openxmlformats.org/drawingml/2006/main" xmlns:r="http://schemas.openxmlformats.org/officeDocument/2006/relationships" xmlns:p="http://schemas.openxmlformats.org/presentationml/2006/main">
   <p:cSld>
     <p:spTree>
@@ -21047,7 +20959,7 @@
 </p:sld>
 </file>
 
-<file path=ppt/slides/slide24.xml><?xml version="1.0" encoding="utf-8"?>
+<file path=ppt/slides/slide21.xml><?xml version="1.0" encoding="utf-8"?>
 <p:sld xmlns:a="http://schemas.openxmlformats.org/drawingml/2006/main" xmlns:r="http://schemas.openxmlformats.org/officeDocument/2006/relationships" xmlns:p="http://schemas.openxmlformats.org/presentationml/2006/main">
   <p:cSld>
     <p:spTree>
@@ -21155,7 +21067,7 @@
 </p:sld>
 </file>
 
-<file path=ppt/slides/slide25.xml><?xml version="1.0" encoding="utf-8"?>
+<file path=ppt/slides/slide22.xml><?xml version="1.0" encoding="utf-8"?>
 <p:sld xmlns:a="http://schemas.openxmlformats.org/drawingml/2006/main" xmlns:r="http://schemas.openxmlformats.org/officeDocument/2006/relationships" xmlns:p="http://schemas.openxmlformats.org/presentationml/2006/main">
   <p:cSld>
     <p:spTree>
@@ -21385,7 +21297,7 @@
 </p:sld>
 </file>
 
-<file path=ppt/slides/slide26.xml><?xml version="1.0" encoding="utf-8"?>
+<file path=ppt/slides/slide23.xml><?xml version="1.0" encoding="utf-8"?>
 <p:sld xmlns:a="http://schemas.openxmlformats.org/drawingml/2006/main" xmlns:r="http://schemas.openxmlformats.org/officeDocument/2006/relationships" xmlns:p="http://schemas.openxmlformats.org/presentationml/2006/main">
   <p:cSld>
     <p:spTree>
@@ -21489,7 +21401,7 @@
 </p:sld>
 </file>
 
-<file path=ppt/slides/slide27.xml><?xml version="1.0" encoding="utf-8"?>
+<file path=ppt/slides/slide24.xml><?xml version="1.0" encoding="utf-8"?>
 <p:sld xmlns:a="http://schemas.openxmlformats.org/drawingml/2006/main" xmlns:r="http://schemas.openxmlformats.org/officeDocument/2006/relationships" xmlns:p="http://schemas.openxmlformats.org/presentationml/2006/main" show="0">
   <p:cSld>
     <p:spTree>
@@ -21598,7 +21510,7 @@
 </p:sld>
 </file>
 
-<file path=ppt/slides/slide28.xml><?xml version="1.0" encoding="utf-8"?>
+<file path=ppt/slides/slide25.xml><?xml version="1.0" encoding="utf-8"?>
 <p:sld xmlns:a="http://schemas.openxmlformats.org/drawingml/2006/main" xmlns:r="http://schemas.openxmlformats.org/officeDocument/2006/relationships" xmlns:p="http://schemas.openxmlformats.org/presentationml/2006/main">
   <p:cSld>
     <p:spTree>
@@ -21693,317 +21605,6 @@
           </a:ln>
         </p:spPr>
       </p:pic>
-      <p:sp>
-        <p:nvSpPr>
-          <p:cNvPr id="4" name="Content Placeholder 1">
-            <a:extLst>
-              <a:ext uri="{FF2B5EF4-FFF2-40B4-BE49-F238E27FC236}">
-                <a16:creationId xmlns:a16="http://schemas.microsoft.com/office/drawing/2014/main" id="{71AD207E-0B93-2645-9A02-1E2348A07737}"/>
-              </a:ext>
-            </a:extLst>
-          </p:cNvPr>
-          <p:cNvSpPr txBox="1">
-            <a:spLocks/>
-          </p:cNvSpPr>
-          <p:nvPr/>
-        </p:nvSpPr>
-        <p:spPr>
-          <a:xfrm>
-            <a:off x="7399938" y="4626787"/>
-            <a:ext cx="4235913" cy="1875007"/>
-          </a:xfrm>
-          <a:prstGeom prst="rect">
-            <a:avLst/>
-          </a:prstGeom>
-          <a:noFill/>
-          <a:ln>
-            <a:noFill/>
-          </a:ln>
-        </p:spPr>
-        <p:txBody>
-          <a:bodyPr spcFirstLastPara="1" wrap="square" lIns="121900" tIns="121900" rIns="121900" bIns="121900" anchor="t" anchorCtr="0">
-            <a:noAutofit/>
-          </a:bodyPr>
-          <a:lstStyle>
-            <a:defPPr marR="0" lvl="0" algn="l" rtl="0">
-              <a:lnSpc>
-                <a:spcPct val="100000"/>
-              </a:lnSpc>
-              <a:spcBef>
-                <a:spcPts val="0"/>
-              </a:spcBef>
-              <a:spcAft>
-                <a:spcPts val="0"/>
-              </a:spcAft>
-            </a:defPPr>
-            <a:lvl1pPr marL="457200" marR="0" lvl="0" indent="-381000" algn="l" rtl="0">
-              <a:lnSpc>
-                <a:spcPct val="115000"/>
-              </a:lnSpc>
-              <a:spcBef>
-                <a:spcPts val="0"/>
-              </a:spcBef>
-              <a:spcAft>
-                <a:spcPts val="0"/>
-              </a:spcAft>
-              <a:buClr>
-                <a:srgbClr val="434343"/>
-              </a:buClr>
-              <a:buSzPts val="2400"/>
-              <a:buFont typeface="Arial"/>
-              <a:buChar char="●"/>
-              <a:defRPr sz="2400" b="0" i="0" u="none" strike="noStrike" cap="none">
-                <a:solidFill>
-                  <a:srgbClr val="434343"/>
-                </a:solidFill>
-                <a:latin typeface="Arial"/>
-                <a:ea typeface="Arial"/>
-                <a:cs typeface="Arial"/>
-                <a:sym typeface="Arial"/>
-              </a:defRPr>
-            </a:lvl1pPr>
-            <a:lvl2pPr marL="914400" marR="0" lvl="1" indent="-349250" algn="l" rtl="0">
-              <a:lnSpc>
-                <a:spcPct val="115000"/>
-              </a:lnSpc>
-              <a:spcBef>
-                <a:spcPts val="2100"/>
-              </a:spcBef>
-              <a:spcAft>
-                <a:spcPts val="0"/>
-              </a:spcAft>
-              <a:buClr>
-                <a:srgbClr val="434343"/>
-              </a:buClr>
-              <a:buSzPts val="1900"/>
-              <a:buFont typeface="Arial"/>
-              <a:buChar char="○"/>
-              <a:defRPr sz="1900" b="0" i="0" u="none" strike="noStrike" cap="none">
-                <a:solidFill>
-                  <a:srgbClr val="434343"/>
-                </a:solidFill>
-                <a:latin typeface="Arial"/>
-                <a:ea typeface="Arial"/>
-                <a:cs typeface="Arial"/>
-                <a:sym typeface="Arial"/>
-              </a:defRPr>
-            </a:lvl2pPr>
-            <a:lvl3pPr marL="1371600" marR="0" lvl="2" indent="-349250" algn="l" rtl="0">
-              <a:lnSpc>
-                <a:spcPct val="115000"/>
-              </a:lnSpc>
-              <a:spcBef>
-                <a:spcPts val="2100"/>
-              </a:spcBef>
-              <a:spcAft>
-                <a:spcPts val="0"/>
-              </a:spcAft>
-              <a:buClr>
-                <a:srgbClr val="434343"/>
-              </a:buClr>
-              <a:buSzPts val="1900"/>
-              <a:buFont typeface="Arial"/>
-              <a:buChar char="■"/>
-              <a:defRPr sz="1900" b="0" i="0" u="none" strike="noStrike" cap="none">
-                <a:solidFill>
-                  <a:srgbClr val="434343"/>
-                </a:solidFill>
-                <a:latin typeface="Arial"/>
-                <a:ea typeface="Arial"/>
-                <a:cs typeface="Arial"/>
-                <a:sym typeface="Arial"/>
-              </a:defRPr>
-            </a:lvl3pPr>
-            <a:lvl4pPr marL="1828800" marR="0" lvl="3" indent="-349250" algn="l" rtl="0">
-              <a:lnSpc>
-                <a:spcPct val="115000"/>
-              </a:lnSpc>
-              <a:spcBef>
-                <a:spcPts val="2100"/>
-              </a:spcBef>
-              <a:spcAft>
-                <a:spcPts val="0"/>
-              </a:spcAft>
-              <a:buClr>
-                <a:srgbClr val="434343"/>
-              </a:buClr>
-              <a:buSzPts val="1900"/>
-              <a:buFont typeface="Arial"/>
-              <a:buChar char="●"/>
-              <a:defRPr sz="1900" b="0" i="0" u="none" strike="noStrike" cap="none">
-                <a:solidFill>
-                  <a:srgbClr val="434343"/>
-                </a:solidFill>
-                <a:latin typeface="Arial"/>
-                <a:ea typeface="Arial"/>
-                <a:cs typeface="Arial"/>
-                <a:sym typeface="Arial"/>
-              </a:defRPr>
-            </a:lvl4pPr>
-            <a:lvl5pPr marL="2286000" marR="0" lvl="4" indent="-349250" algn="l" rtl="0">
-              <a:lnSpc>
-                <a:spcPct val="115000"/>
-              </a:lnSpc>
-              <a:spcBef>
-                <a:spcPts val="2100"/>
-              </a:spcBef>
-              <a:spcAft>
-                <a:spcPts val="0"/>
-              </a:spcAft>
-              <a:buClr>
-                <a:srgbClr val="434343"/>
-              </a:buClr>
-              <a:buSzPts val="1900"/>
-              <a:buFont typeface="Arial"/>
-              <a:buChar char="○"/>
-              <a:defRPr sz="1900" b="0" i="0" u="none" strike="noStrike" cap="none">
-                <a:solidFill>
-                  <a:srgbClr val="434343"/>
-                </a:solidFill>
-                <a:latin typeface="Arial"/>
-                <a:ea typeface="Arial"/>
-                <a:cs typeface="Arial"/>
-                <a:sym typeface="Arial"/>
-              </a:defRPr>
-            </a:lvl5pPr>
-            <a:lvl6pPr marL="2743200" marR="0" lvl="5" indent="-349250" algn="l" rtl="0">
-              <a:lnSpc>
-                <a:spcPct val="115000"/>
-              </a:lnSpc>
-              <a:spcBef>
-                <a:spcPts val="2100"/>
-              </a:spcBef>
-              <a:spcAft>
-                <a:spcPts val="0"/>
-              </a:spcAft>
-              <a:buClr>
-                <a:srgbClr val="434343"/>
-              </a:buClr>
-              <a:buSzPts val="1900"/>
-              <a:buFont typeface="Arial"/>
-              <a:buChar char="■"/>
-              <a:defRPr sz="1900" b="0" i="0" u="none" strike="noStrike" cap="none">
-                <a:solidFill>
-                  <a:srgbClr val="434343"/>
-                </a:solidFill>
-                <a:latin typeface="Arial"/>
-                <a:ea typeface="Arial"/>
-                <a:cs typeface="Arial"/>
-                <a:sym typeface="Arial"/>
-              </a:defRPr>
-            </a:lvl6pPr>
-            <a:lvl7pPr marL="3200400" marR="0" lvl="6" indent="-349250" algn="l" rtl="0">
-              <a:lnSpc>
-                <a:spcPct val="115000"/>
-              </a:lnSpc>
-              <a:spcBef>
-                <a:spcPts val="2100"/>
-              </a:spcBef>
-              <a:spcAft>
-                <a:spcPts val="0"/>
-              </a:spcAft>
-              <a:buClr>
-                <a:srgbClr val="434343"/>
-              </a:buClr>
-              <a:buSzPts val="1900"/>
-              <a:buFont typeface="Arial"/>
-              <a:buChar char="●"/>
-              <a:defRPr sz="1900" b="0" i="0" u="none" strike="noStrike" cap="none">
-                <a:solidFill>
-                  <a:srgbClr val="434343"/>
-                </a:solidFill>
-                <a:latin typeface="Arial"/>
-                <a:ea typeface="Arial"/>
-                <a:cs typeface="Arial"/>
-                <a:sym typeface="Arial"/>
-              </a:defRPr>
-            </a:lvl7pPr>
-            <a:lvl8pPr marL="3657600" marR="0" lvl="7" indent="-349250" algn="l" rtl="0">
-              <a:lnSpc>
-                <a:spcPct val="115000"/>
-              </a:lnSpc>
-              <a:spcBef>
-                <a:spcPts val="2100"/>
-              </a:spcBef>
-              <a:spcAft>
-                <a:spcPts val="0"/>
-              </a:spcAft>
-              <a:buClr>
-                <a:srgbClr val="434343"/>
-              </a:buClr>
-              <a:buSzPts val="1900"/>
-              <a:buFont typeface="Arial"/>
-              <a:buChar char="○"/>
-              <a:defRPr sz="1900" b="0" i="0" u="none" strike="noStrike" cap="none">
-                <a:solidFill>
-                  <a:srgbClr val="434343"/>
-                </a:solidFill>
-                <a:latin typeface="Arial"/>
-                <a:ea typeface="Arial"/>
-                <a:cs typeface="Arial"/>
-                <a:sym typeface="Arial"/>
-              </a:defRPr>
-            </a:lvl8pPr>
-            <a:lvl9pPr marL="4114800" marR="0" lvl="8" indent="-349250" algn="l" rtl="0">
-              <a:lnSpc>
-                <a:spcPct val="115000"/>
-              </a:lnSpc>
-              <a:spcBef>
-                <a:spcPts val="2100"/>
-              </a:spcBef>
-              <a:spcAft>
-                <a:spcPts val="2100"/>
-              </a:spcAft>
-              <a:buClr>
-                <a:srgbClr val="434343"/>
-              </a:buClr>
-              <a:buSzPts val="1900"/>
-              <a:buFont typeface="Arial"/>
-              <a:buChar char="■"/>
-              <a:defRPr sz="1900" b="0" i="0" u="none" strike="noStrike" cap="none">
-                <a:solidFill>
-                  <a:srgbClr val="434343"/>
-                </a:solidFill>
-                <a:latin typeface="Arial"/>
-                <a:ea typeface="Arial"/>
-                <a:cs typeface="Arial"/>
-                <a:sym typeface="Arial"/>
-              </a:defRPr>
-            </a:lvl9pPr>
-          </a:lstStyle>
-          <a:p>
-            <a:pPr marL="76200" indent="0" algn="ctr">
-              <a:buNone/>
-            </a:pPr>
-            <a:r>
-              <a:rPr lang="en-US" sz="5400" b="1" dirty="0" err="1">
-                <a:solidFill>
-                  <a:srgbClr val="C00000"/>
-                </a:solidFill>
-              </a:rPr>
-              <a:t>slido.com</a:t>
-            </a:r>
-            <a:endParaRPr lang="en-US" sz="5400" b="1" dirty="0">
-              <a:solidFill>
-                <a:srgbClr val="C00000"/>
-              </a:solidFill>
-            </a:endParaRPr>
-          </a:p>
-          <a:p>
-            <a:pPr marL="76200" indent="0" algn="ctr">
-              <a:buNone/>
-            </a:pPr>
-            <a:r>
-              <a:rPr lang="en-US" sz="5400" b="1" dirty="0">
-                <a:solidFill>
-                  <a:srgbClr val="C00000"/>
-                </a:solidFill>
-              </a:rPr>
-              <a:t>#10718</a:t>
-            </a:r>
-          </a:p>
-        </p:txBody>
-      </p:sp>
       <p:sp>
         <p:nvSpPr>
           <p:cNvPr id="2" name="TextBox 1">
@@ -22350,36 +21951,6 @@
           </a:fontRef>
         </p:style>
       </p:cxnSp>
-      <p:pic>
-        <p:nvPicPr>
-          <p:cNvPr id="17" name="Picture 16">
-            <a:extLst>
-              <a:ext uri="{FF2B5EF4-FFF2-40B4-BE49-F238E27FC236}">
-                <a16:creationId xmlns:a16="http://schemas.microsoft.com/office/drawing/2014/main" id="{77A8866E-865F-574F-AB93-85C7A497D98A}"/>
-              </a:ext>
-            </a:extLst>
-          </p:cNvPr>
-          <p:cNvPicPr>
-            <a:picLocks noChangeAspect="1"/>
-          </p:cNvPicPr>
-          <p:nvPr/>
-        </p:nvPicPr>
-        <p:blipFill>
-          <a:blip r:embed="rId4"/>
-          <a:stretch>
-            <a:fillRect/>
-          </a:stretch>
-        </p:blipFill>
-        <p:spPr>
-          <a:xfrm>
-            <a:off x="8190745" y="2180223"/>
-            <a:ext cx="2654300" cy="2641600"/>
-          </a:xfrm>
-          <a:prstGeom prst="rect">
-            <a:avLst/>
-          </a:prstGeom>
-        </p:spPr>
-      </p:pic>
     </p:spTree>
   </p:cSld>
   <p:clrMapOvr>
@@ -22388,7 +21959,7 @@
 </p:sld>
 </file>
 
-<file path=ppt/slides/slide29.xml><?xml version="1.0" encoding="utf-8"?>
+<file path=ppt/slides/slide26.xml><?xml version="1.0" encoding="utf-8"?>
 <p:sld xmlns:a="http://schemas.openxmlformats.org/drawingml/2006/main" xmlns:r="http://schemas.openxmlformats.org/officeDocument/2006/relationships" xmlns:p="http://schemas.openxmlformats.org/presentationml/2006/main">
   <p:cSld>
     <p:spTree>
@@ -22531,6 +22102,390 @@
     <p:extLst>
       <p:ext uri="{BB962C8B-B14F-4D97-AF65-F5344CB8AC3E}">
         <p14:creationId xmlns:p14="http://schemas.microsoft.com/office/powerpoint/2010/main" val="1368328384"/>
+      </p:ext>
+    </p:extLst>
+  </p:cSld>
+  <p:clrMapOvr>
+    <a:masterClrMapping/>
+  </p:clrMapOvr>
+</p:sld>
+</file>
+
+<file path=ppt/slides/slide27.xml><?xml version="1.0" encoding="utf-8"?>
+<p:sld xmlns:a="http://schemas.openxmlformats.org/drawingml/2006/main" xmlns:r="http://schemas.openxmlformats.org/officeDocument/2006/relationships" xmlns:p="http://schemas.openxmlformats.org/presentationml/2006/main">
+  <p:cSld>
+    <p:spTree>
+      <p:nvGrpSpPr>
+        <p:cNvPr id="1" name="">
+          <a:extLst>
+            <a:ext uri="{FF2B5EF4-FFF2-40B4-BE49-F238E27FC236}">
+              <a16:creationId xmlns:a16="http://schemas.microsoft.com/office/drawing/2014/main" id="{6C49C3AB-BB95-88F1-E421-6A5E10E1C580}"/>
+            </a:ext>
+          </a:extLst>
+        </p:cNvPr>
+        <p:cNvGrpSpPr/>
+        <p:nvPr/>
+      </p:nvGrpSpPr>
+      <p:grpSpPr>
+        <a:xfrm>
+          <a:off x="0" y="0"/>
+          <a:ext cx="0" cy="0"/>
+          <a:chOff x="0" y="0"/>
+          <a:chExt cx="0" cy="0"/>
+        </a:xfrm>
+      </p:grpSpPr>
+      <p:sp>
+        <p:nvSpPr>
+          <p:cNvPr id="2" name="Title 1">
+            <a:extLst>
+              <a:ext uri="{FF2B5EF4-FFF2-40B4-BE49-F238E27FC236}">
+                <a16:creationId xmlns:a16="http://schemas.microsoft.com/office/drawing/2014/main" id="{08FA0054-7A1D-8CF9-4632-B873719E0B1D}"/>
+              </a:ext>
+            </a:extLst>
+          </p:cNvPr>
+          <p:cNvSpPr>
+            <a:spLocks noGrp="1"/>
+          </p:cNvSpPr>
+          <p:nvPr>
+            <p:ph type="title"/>
+          </p:nvPr>
+        </p:nvSpPr>
+        <p:spPr/>
+        <p:txBody>
+          <a:bodyPr/>
+          <a:lstStyle/>
+          <a:p>
+            <a:r>
+              <a:rPr lang="en-US" dirty="0"/>
+              <a:t>Types of </a:t>
+            </a:r>
+            <a:r>
+              <a:rPr lang="en-US" dirty="0" err="1"/>
+              <a:t>Interpretablity</a:t>
+            </a:r>
+            <a:r>
+              <a:rPr lang="en-US" dirty="0"/>
+              <a:t> Methods</a:t>
+            </a:r>
+          </a:p>
+        </p:txBody>
+      </p:sp>
+      <p:sp>
+        <p:nvSpPr>
+          <p:cNvPr id="3" name="Text Placeholder 2">
+            <a:extLst>
+              <a:ext uri="{FF2B5EF4-FFF2-40B4-BE49-F238E27FC236}">
+                <a16:creationId xmlns:a16="http://schemas.microsoft.com/office/drawing/2014/main" id="{D1592D8E-309B-ADFF-75C9-820C0F2B840C}"/>
+              </a:ext>
+            </a:extLst>
+          </p:cNvPr>
+          <p:cNvSpPr>
+            <a:spLocks noGrp="1"/>
+          </p:cNvSpPr>
+          <p:nvPr>
+            <p:ph type="body" idx="1"/>
+          </p:nvPr>
+        </p:nvSpPr>
+        <p:spPr/>
+        <p:txBody>
+          <a:bodyPr/>
+          <a:lstStyle/>
+          <a:p>
+            <a:r>
+              <a:rPr lang="en-US" dirty="0"/>
+              <a:t>Global vs Local</a:t>
+            </a:r>
+          </a:p>
+          <a:p>
+            <a:r>
+              <a:rPr lang="en-US" dirty="0"/>
+              <a:t>Inherently Interpretable models vs Post-hoc model agnostic</a:t>
+            </a:r>
+          </a:p>
+        </p:txBody>
+      </p:sp>
+    </p:spTree>
+    <p:extLst>
+      <p:ext uri="{BB962C8B-B14F-4D97-AF65-F5344CB8AC3E}">
+        <p14:creationId xmlns:p14="http://schemas.microsoft.com/office/powerpoint/2010/main" val="3038106125"/>
+      </p:ext>
+    </p:extLst>
+  </p:cSld>
+  <p:clrMapOvr>
+    <a:masterClrMapping/>
+  </p:clrMapOvr>
+</p:sld>
+</file>
+
+<file path=ppt/slides/slide28.xml><?xml version="1.0" encoding="utf-8"?>
+<p:sld xmlns:a="http://schemas.openxmlformats.org/drawingml/2006/main" xmlns:r="http://schemas.openxmlformats.org/officeDocument/2006/relationships" xmlns:p="http://schemas.openxmlformats.org/presentationml/2006/main">
+  <p:cSld>
+    <p:spTree>
+      <p:nvGrpSpPr>
+        <p:cNvPr id="1" name="">
+          <a:extLst>
+            <a:ext uri="{FF2B5EF4-FFF2-40B4-BE49-F238E27FC236}">
+              <a16:creationId xmlns:a16="http://schemas.microsoft.com/office/drawing/2014/main" id="{5A4A1781-6F03-BCB9-2A6D-E0B292EB7272}"/>
+            </a:ext>
+          </a:extLst>
+        </p:cNvPr>
+        <p:cNvGrpSpPr/>
+        <p:nvPr/>
+      </p:nvGrpSpPr>
+      <p:grpSpPr>
+        <a:xfrm>
+          <a:off x="0" y="0"/>
+          <a:ext cx="0" cy="0"/>
+          <a:chOff x="0" y="0"/>
+          <a:chExt cx="0" cy="0"/>
+        </a:xfrm>
+      </p:grpSpPr>
+      <p:sp>
+        <p:nvSpPr>
+          <p:cNvPr id="2" name="Title 1">
+            <a:extLst>
+              <a:ext uri="{FF2B5EF4-FFF2-40B4-BE49-F238E27FC236}">
+                <a16:creationId xmlns:a16="http://schemas.microsoft.com/office/drawing/2014/main" id="{6CC566F7-F466-B673-3262-E20C76F10F99}"/>
+              </a:ext>
+            </a:extLst>
+          </p:cNvPr>
+          <p:cNvSpPr>
+            <a:spLocks noGrp="1"/>
+          </p:cNvSpPr>
+          <p:nvPr>
+            <p:ph type="title"/>
+          </p:nvPr>
+        </p:nvSpPr>
+        <p:spPr/>
+        <p:txBody>
+          <a:bodyPr/>
+          <a:lstStyle/>
+          <a:p>
+            <a:r>
+              <a:rPr lang="en-US" dirty="0"/>
+              <a:t>Global vs. Local</a:t>
+            </a:r>
+          </a:p>
+        </p:txBody>
+      </p:sp>
+      <p:sp>
+        <p:nvSpPr>
+          <p:cNvPr id="3" name="Text Placeholder 2">
+            <a:extLst>
+              <a:ext uri="{FF2B5EF4-FFF2-40B4-BE49-F238E27FC236}">
+                <a16:creationId xmlns:a16="http://schemas.microsoft.com/office/drawing/2014/main" id="{DAE83382-D87E-31EB-0F5D-BBFAE53BA57D}"/>
+              </a:ext>
+            </a:extLst>
+          </p:cNvPr>
+          <p:cNvSpPr>
+            <a:spLocks noGrp="1"/>
+          </p:cNvSpPr>
+          <p:nvPr>
+            <p:ph type="body" idx="1"/>
+          </p:nvPr>
+        </p:nvSpPr>
+        <p:spPr/>
+        <p:txBody>
+          <a:bodyPr/>
+          <a:lstStyle/>
+          <a:p>
+            <a:pPr marL="76200" indent="0">
+              <a:buNone/>
+            </a:pPr>
+            <a:endParaRPr lang="en-US" dirty="0"/>
+          </a:p>
+          <a:p>
+            <a:r>
+              <a:rPr lang="en-US" dirty="0"/>
+              <a:t>Global: how the entire model behaves on average.</a:t>
+            </a:r>
+          </a:p>
+          <a:p>
+            <a:pPr marL="76200" indent="0">
+              <a:buNone/>
+            </a:pPr>
+            <a:r>
+              <a:rPr lang="en-US" dirty="0"/>
+              <a:t>		e.g. feature importance, coefficients, partial-dependence plots.</a:t>
+            </a:r>
+          </a:p>
+          <a:p>
+            <a:endParaRPr lang="en-US" dirty="0"/>
+          </a:p>
+          <a:p>
+            <a:r>
+              <a:rPr lang="en-US" dirty="0"/>
+              <a:t>Local: why one prediction was made.</a:t>
+            </a:r>
+          </a:p>
+          <a:p>
+            <a:pPr lvl="1"/>
+            <a:r>
+              <a:rPr lang="en-US" dirty="0"/>
+              <a:t>e.g. SHAP or LIME explanation for a single case.</a:t>
+            </a:r>
+          </a:p>
+          <a:p>
+            <a:endParaRPr lang="en-US" dirty="0"/>
+          </a:p>
+          <a:p>
+            <a:endParaRPr lang="en-US" dirty="0"/>
+          </a:p>
+          <a:p>
+            <a:endParaRPr lang="en-US" dirty="0"/>
+          </a:p>
+          <a:p>
+            <a:endParaRPr lang="en-US" dirty="0"/>
+          </a:p>
+          <a:p>
+            <a:endParaRPr lang="en-US" dirty="0"/>
+          </a:p>
+          <a:p>
+            <a:endParaRPr lang="en-US" dirty="0"/>
+          </a:p>
+        </p:txBody>
+      </p:sp>
+    </p:spTree>
+    <p:extLst>
+      <p:ext uri="{BB962C8B-B14F-4D97-AF65-F5344CB8AC3E}">
+        <p14:creationId xmlns:p14="http://schemas.microsoft.com/office/powerpoint/2010/main" val="330643369"/>
+      </p:ext>
+    </p:extLst>
+  </p:cSld>
+  <p:clrMapOvr>
+    <a:masterClrMapping/>
+  </p:clrMapOvr>
+</p:sld>
+</file>
+
+<file path=ppt/slides/slide29.xml><?xml version="1.0" encoding="utf-8"?>
+<p:sld xmlns:a="http://schemas.openxmlformats.org/drawingml/2006/main" xmlns:r="http://schemas.openxmlformats.org/officeDocument/2006/relationships" xmlns:p="http://schemas.openxmlformats.org/presentationml/2006/main">
+  <p:cSld>
+    <p:spTree>
+      <p:nvGrpSpPr>
+        <p:cNvPr id="1" name="">
+          <a:extLst>
+            <a:ext uri="{FF2B5EF4-FFF2-40B4-BE49-F238E27FC236}">
+              <a16:creationId xmlns:a16="http://schemas.microsoft.com/office/drawing/2014/main" id="{3BD0CA81-F948-C6E5-F3C0-40986A0AB776}"/>
+            </a:ext>
+          </a:extLst>
+        </p:cNvPr>
+        <p:cNvGrpSpPr/>
+        <p:nvPr/>
+      </p:nvGrpSpPr>
+      <p:grpSpPr>
+        <a:xfrm>
+          <a:off x="0" y="0"/>
+          <a:ext cx="0" cy="0"/>
+          <a:chOff x="0" y="0"/>
+          <a:chExt cx="0" cy="0"/>
+        </a:xfrm>
+      </p:grpSpPr>
+      <p:sp>
+        <p:nvSpPr>
+          <p:cNvPr id="2" name="Title 1">
+            <a:extLst>
+              <a:ext uri="{FF2B5EF4-FFF2-40B4-BE49-F238E27FC236}">
+                <a16:creationId xmlns:a16="http://schemas.microsoft.com/office/drawing/2014/main" id="{9BC859A0-0EE8-B652-2890-A75667C3D4F9}"/>
+              </a:ext>
+            </a:extLst>
+          </p:cNvPr>
+          <p:cNvSpPr>
+            <a:spLocks noGrp="1"/>
+          </p:cNvSpPr>
+          <p:nvPr>
+            <p:ph type="title"/>
+          </p:nvPr>
+        </p:nvSpPr>
+        <p:spPr/>
+        <p:txBody>
+          <a:bodyPr/>
+          <a:lstStyle/>
+          <a:p>
+            <a:r>
+              <a:rPr lang="en-US" b="1" dirty="0"/>
+              <a:t>Intrinsic vs. Post-hoc</a:t>
+            </a:r>
+            <a:br>
+              <a:rPr lang="en-US" b="1" dirty="0"/>
+            </a:br>
+            <a:endParaRPr lang="en-US" dirty="0"/>
+          </a:p>
+        </p:txBody>
+      </p:sp>
+      <p:sp>
+        <p:nvSpPr>
+          <p:cNvPr id="3" name="Text Placeholder 2">
+            <a:extLst>
+              <a:ext uri="{FF2B5EF4-FFF2-40B4-BE49-F238E27FC236}">
+                <a16:creationId xmlns:a16="http://schemas.microsoft.com/office/drawing/2014/main" id="{0AF454B1-205D-8040-3F2B-F1F4E379FAB5}"/>
+              </a:ext>
+            </a:extLst>
+          </p:cNvPr>
+          <p:cNvSpPr>
+            <a:spLocks noGrp="1"/>
+          </p:cNvSpPr>
+          <p:nvPr>
+            <p:ph type="body" idx="1"/>
+          </p:nvPr>
+        </p:nvSpPr>
+        <p:spPr/>
+        <p:txBody>
+          <a:bodyPr/>
+          <a:lstStyle/>
+          <a:p>
+            <a:r>
+              <a:rPr lang="en-US" b="1" dirty="0"/>
+              <a:t>Intrinsic</a:t>
+            </a:r>
+            <a:r>
+              <a:rPr lang="en-US" dirty="0"/>
+              <a:t> — Model itself is understandable (e.g., linear regression, decision trees, generalized additive models).</a:t>
+            </a:r>
+          </a:p>
+          <a:p>
+            <a:r>
+              <a:rPr lang="en-US" b="1" dirty="0"/>
+              <a:t>Post-hoc</a:t>
+            </a:r>
+            <a:r>
+              <a:rPr lang="en-US" dirty="0"/>
+              <a:t> — Use secondary methods to explain black boxes (e.g., SHAP, LIME, Grad-CAM).</a:t>
+            </a:r>
+          </a:p>
+          <a:p>
+            <a:endParaRPr lang="en-US" dirty="0"/>
+          </a:p>
+          <a:p>
+            <a:endParaRPr lang="en-US" dirty="0"/>
+          </a:p>
+          <a:p>
+            <a:pPr marL="76200" indent="0" algn="ctr">
+              <a:buNone/>
+            </a:pPr>
+            <a:r>
+              <a:rPr lang="en-US" sz="4000" dirty="0"/>
+              <a:t>Tradeoffs?</a:t>
+            </a:r>
+          </a:p>
+          <a:p>
+            <a:endParaRPr lang="en-US" dirty="0"/>
+          </a:p>
+          <a:p>
+            <a:endParaRPr lang="en-US" dirty="0"/>
+          </a:p>
+          <a:p>
+            <a:endParaRPr lang="en-US" dirty="0"/>
+          </a:p>
+          <a:p>
+            <a:endParaRPr lang="en-US" dirty="0"/>
+          </a:p>
+        </p:txBody>
+      </p:sp>
+    </p:spTree>
+    <p:extLst>
+      <p:ext uri="{BB962C8B-B14F-4D97-AF65-F5344CB8AC3E}">
+        <p14:creationId xmlns:p14="http://schemas.microsoft.com/office/powerpoint/2010/main" val="4174145211"/>
       </p:ext>
     </p:extLst>
   </p:cSld>
@@ -23198,7 +23153,10 @@
           <a:bodyPr/>
           <a:lstStyle/>
           <a:p>
-            <a:endParaRPr lang="en-US"/>
+            <a:r>
+              <a:rPr lang="en-US" dirty="0"/>
+              <a:t>Common types of methods for Deep Learning</a:t>
+            </a:r>
           </a:p>
         </p:txBody>
       </p:sp>
@@ -28271,6 +28229,27 @@
 </p:tagLst>
 </file>
 
+<file path=ppt/tags/tag5.xml><?xml version="1.0" encoding="utf-8"?>
+<p:tagLst xmlns:a="http://schemas.openxmlformats.org/drawingml/2006/main" xmlns:r="http://schemas.openxmlformats.org/officeDocument/2006/relationships" xmlns:p="http://schemas.openxmlformats.org/presentationml/2006/main">
+  <p:tag name="SLIDO_TYPE" val="SlidoPoll"/>
+  <p:tag name="SLIDO_POLL_UUID" val="a66c6655-8cec-4e08-bd19-f9e3e4ec4293"/>
+  <p:tag name="SLIDO_TIMELINE" val="W3sicG9sbFF1ZXN0aW9uVXVpZCI6ImQ0OTk1ZmIxLWNkMjQtNGYxOC1hNTRjLWE1YjZhOWFkODM0ZCIsInNob3dSZXN1bHRzIjpmYWxzZX0seyJwb2xsUXVlc3Rpb25VdWlkIjoiZDQ5OTVmYjEtY2QyNC00ZjE4LWE1NGMtYTViNmE5YWQ4MzRkIiwic2hvd1Jlc3VsdHMiOnRydWV9XQ=="/>
+</p:tagLst>
+</file>
+
+<file path=ppt/tags/tag6.xml><?xml version="1.0" encoding="utf-8"?>
+<p:tagLst xmlns:a="http://schemas.openxmlformats.org/drawingml/2006/main" xmlns:r="http://schemas.openxmlformats.org/officeDocument/2006/relationships" xmlns:p="http://schemas.openxmlformats.org/presentationml/2006/main">
+  <p:tag name="SLIDO_ELEMENT" val="interaction_image"/>
+  <p:tag name="INTERACTION_TYPE" val="OpenText"/>
+</p:tagLst>
+</file>
+
+<file path=ppt/tags/tag7.xml><?xml version="1.0" encoding="utf-8"?>
+<p:tagLst xmlns:a="http://schemas.openxmlformats.org/drawingml/2006/main" xmlns:r="http://schemas.openxmlformats.org/officeDocument/2006/relationships" xmlns:p="http://schemas.openxmlformats.org/presentationml/2006/main">
+  <p:tag name="SLIDO_ELEMENT" val="title"/>
+</p:tagLst>
+</file>
+
 <file path=ppt/theme/theme1.xml><?xml version="1.0" encoding="utf-8"?>
 <a:theme xmlns:a="http://schemas.openxmlformats.org/drawingml/2006/main" name="Simple Light">
   <a:themeElements>
